--- a/output_pptx/Nothing_But_The_Blood.pptx
+++ b/output_pptx/Nothing_But_The_Blood.pptx
@@ -3119,23 +3119,23 @@
         </p:nvSpPr>
         <p:spPr>
           <a:xfrm>
-            <a:off x="594360" y="2258568"/>
-            <a:ext cx="11002975" cy="685800"/>
-          </a:xfrm>
-          <a:prstGeom prst="rect">
-            <a:avLst/>
-          </a:prstGeom>
-          <a:noFill/>
-        </p:spPr>
-        <p:txBody>
-          <a:bodyPr wrap="square">
-            <a:spAutoFit/>
-          </a:bodyPr>
-          <a:lstStyle/>
-          <a:p>
-            <a:pPr algn="ctr"/>
-            <a:r>
-              <a:rPr sz="4400" b="1" i="0">
+            <a:off x="640080" y="2052828"/>
+            <a:ext cx="10911535" cy="731520"/>
+          </a:xfrm>
+          <a:prstGeom prst="rect">
+            <a:avLst/>
+          </a:prstGeom>
+          <a:noFill/>
+        </p:spPr>
+        <p:txBody>
+          <a:bodyPr wrap="square">
+            <a:spAutoFit/>
+          </a:bodyPr>
+          <a:lstStyle/>
+          <a:p>
+            <a:pPr algn="ctr"/>
+            <a:r>
+              <a:rPr sz="4800" b="1" i="0">
                 <a:solidFill>
                   <a:srgbClr val="FFFFFF"/>
                 </a:solidFill>
@@ -3154,99 +3154,29 @@
         </p:nvSpPr>
         <p:spPr>
           <a:xfrm>
-            <a:off x="594360" y="2980944"/>
-            <a:ext cx="11002975" cy="347472"/>
-          </a:xfrm>
-          <a:prstGeom prst="rect">
-            <a:avLst/>
-          </a:prstGeom>
-          <a:noFill/>
-        </p:spPr>
-        <p:txBody>
-          <a:bodyPr wrap="square">
-            <a:spAutoFit/>
-          </a:bodyPr>
-          <a:lstStyle/>
-          <a:p>
-            <a:pPr algn="ctr"/>
-            <a:r>
-              <a:rPr sz="2200" b="0" i="1">
-                <a:solidFill>
-                  <a:srgbClr val="8C8C8C"/>
-                </a:solidFill>
-                <a:latin typeface="Arial"/>
-              </a:rPr>
-              <a:t/>
-            </a:r>
-          </a:p>
-        </p:txBody>
-      </p:sp>
-      <p:sp>
-        <p:nvSpPr>
-          <p:cNvPr id="4" name="TextBox 3"/>
-          <p:cNvSpPr txBox="1"/>
-          <p:nvPr/>
-        </p:nvSpPr>
-        <p:spPr>
-          <a:xfrm>
-            <a:off x="594360" y="3529584"/>
-            <a:ext cx="11002975" cy="685800"/>
-          </a:xfrm>
-          <a:prstGeom prst="rect">
-            <a:avLst/>
-          </a:prstGeom>
-          <a:noFill/>
-        </p:spPr>
-        <p:txBody>
-          <a:bodyPr wrap="square">
-            <a:spAutoFit/>
-          </a:bodyPr>
-          <a:lstStyle/>
-          <a:p>
-            <a:pPr algn="ctr"/>
-            <a:r>
-              <a:rPr sz="4400" b="1" i="0">
+            <a:off x="640080" y="2985516"/>
+            <a:ext cx="10911535" cy="731520"/>
+          </a:xfrm>
+          <a:prstGeom prst="rect">
+            <a:avLst/>
+          </a:prstGeom>
+          <a:noFill/>
+        </p:spPr>
+        <p:txBody>
+          <a:bodyPr wrap="square">
+            <a:spAutoFit/>
+          </a:bodyPr>
+          <a:lstStyle/>
+          <a:p>
+            <a:pPr algn="ctr"/>
+            <a:r>
+              <a:rPr sz="4800" b="1" i="0">
                 <a:solidFill>
                   <a:srgbClr val="FFFFFF"/>
                 </a:solidFill>
                 <a:latin typeface="Arial"/>
               </a:rPr>
               <a:t>Teu sangue</a:t>
-            </a:r>
-          </a:p>
-        </p:txBody>
-      </p:sp>
-      <p:sp>
-        <p:nvSpPr>
-          <p:cNvPr id="5" name="TextBox 4"/>
-          <p:cNvSpPr txBox="1"/>
-          <p:nvPr/>
-        </p:nvSpPr>
-        <p:spPr>
-          <a:xfrm>
-            <a:off x="594360" y="4251960"/>
-            <a:ext cx="11002975" cy="347472"/>
-          </a:xfrm>
-          <a:prstGeom prst="rect">
-            <a:avLst/>
-          </a:prstGeom>
-          <a:noFill/>
-        </p:spPr>
-        <p:txBody>
-          <a:bodyPr wrap="square">
-            <a:spAutoFit/>
-          </a:bodyPr>
-          <a:lstStyle/>
-          <a:p>
-            <a:pPr algn="ctr"/>
-            <a:r>
-              <a:rPr sz="2200" b="0" i="1">
-                <a:solidFill>
-                  <a:srgbClr val="8C8C8C"/>
-                </a:solidFill>
-                <a:latin typeface="Arial"/>
-              </a:rPr>
-              <a:t/>
             </a:r>
           </a:p>
         </p:txBody>
@@ -3285,23 +3215,23 @@
         </p:nvSpPr>
         <p:spPr>
           <a:xfrm>
-            <a:off x="594360" y="1837944"/>
-            <a:ext cx="11002975" cy="685800"/>
-          </a:xfrm>
-          <a:prstGeom prst="rect">
-            <a:avLst/>
-          </a:prstGeom>
-          <a:noFill/>
-        </p:spPr>
-        <p:txBody>
-          <a:bodyPr wrap="square">
-            <a:spAutoFit/>
-          </a:bodyPr>
-          <a:lstStyle/>
-          <a:p>
-            <a:pPr algn="ctr"/>
-            <a:r>
-              <a:rPr sz="4400" b="1" i="0">
+            <a:off x="640080" y="1650492"/>
+            <a:ext cx="10911535" cy="731520"/>
+          </a:xfrm>
+          <a:prstGeom prst="rect">
+            <a:avLst/>
+          </a:prstGeom>
+          <a:noFill/>
+        </p:spPr>
+        <p:txBody>
+          <a:bodyPr wrap="square">
+            <a:spAutoFit/>
+          </a:bodyPr>
+          <a:lstStyle/>
+          <a:p>
+            <a:pPr algn="ctr"/>
+            <a:r>
+              <a:rPr sz="4800" b="1" i="0">
                 <a:solidFill>
                   <a:srgbClr val="FFFFFF"/>
                 </a:solidFill>
@@ -3320,8 +3250,8 @@
         </p:nvSpPr>
         <p:spPr>
           <a:xfrm>
-            <a:off x="594360" y="2560320"/>
-            <a:ext cx="11002975" cy="384048"/>
+            <a:off x="640080" y="2418588"/>
+            <a:ext cx="10911535" cy="365760"/>
           </a:xfrm>
           <a:prstGeom prst="rect">
             <a:avLst/>
@@ -3338,7 +3268,7 @@
             <a:r>
               <a:rPr sz="2400" b="0" i="1">
                 <a:solidFill>
-                  <a:srgbClr val="B4B4B4"/>
+                  <a:srgbClr val="AAAAAA"/>
                 </a:solidFill>
                 <a:latin typeface="Arial"/>
               </a:rPr>
@@ -3355,8 +3285,78 @@
         </p:nvSpPr>
         <p:spPr>
           <a:xfrm>
-            <a:off x="594360" y="2980944"/>
-            <a:ext cx="11002975" cy="347472"/>
+            <a:off x="640080" y="2985516"/>
+            <a:ext cx="10911535" cy="731520"/>
+          </a:xfrm>
+          <a:prstGeom prst="rect">
+            <a:avLst/>
+          </a:prstGeom>
+          <a:noFill/>
+        </p:spPr>
+        <p:txBody>
+          <a:bodyPr wrap="square">
+            <a:spAutoFit/>
+          </a:bodyPr>
+          <a:lstStyle/>
+          <a:p>
+            <a:pPr algn="ctr"/>
+            <a:r>
+              <a:rPr sz="4800" b="1" i="0">
+                <a:solidFill>
+                  <a:srgbClr val="FFFFFF"/>
+                </a:solidFill>
+                <a:latin typeface="Arial"/>
+              </a:rPr>
+              <a:t>我の泉        彼の血のほかなく</a:t>
+            </a:r>
+          </a:p>
+        </p:txBody>
+      </p:sp>
+      <p:sp>
+        <p:nvSpPr>
+          <p:cNvPr id="5" name="TextBox 4"/>
+          <p:cNvSpPr txBox="1"/>
+          <p:nvPr/>
+        </p:nvSpPr>
+        <p:spPr>
+          <a:xfrm>
+            <a:off x="640080" y="3753612"/>
+            <a:ext cx="10911535" cy="365760"/>
+          </a:xfrm>
+          <a:prstGeom prst="rect">
+            <a:avLst/>
+          </a:prstGeom>
+          <a:noFill/>
+        </p:spPr>
+        <p:txBody>
+          <a:bodyPr wrap="square">
+            <a:spAutoFit/>
+          </a:bodyPr>
+          <a:lstStyle/>
+          <a:p>
+            <a:pPr algn="ctr"/>
+            <a:r>
+              <a:rPr sz="2400" b="0" i="1">
+                <a:solidFill>
+                  <a:srgbClr val="AAAAAA"/>
+                </a:solidFill>
+                <a:latin typeface="Arial"/>
+              </a:rPr>
+              <a:t>ware no izumi kano chino hoka naku</a:t>
+            </a:r>
+          </a:p>
+        </p:txBody>
+      </p:sp>
+      <p:sp>
+        <p:nvSpPr>
+          <p:cNvPr id="6" name="TextBox 5"/>
+          <p:cNvSpPr txBox="1"/>
+          <p:nvPr/>
+        </p:nvSpPr>
+        <p:spPr>
+          <a:xfrm>
+            <a:off x="640080" y="4530852"/>
+            <a:ext cx="10911535" cy="310896"/>
           </a:xfrm>
           <a:prstGeom prst="rect">
             <a:avLst/>
@@ -3373,7 +3373,7 @@
             <a:r>
               <a:rPr sz="2000" b="0" i="1">
                 <a:solidFill>
-                  <a:srgbClr val="8C8C8C"/>
+                  <a:srgbClr val="828282"/>
                 </a:solidFill>
                 <a:latin typeface="Arial"/>
               </a:rPr>
@@ -3384,84 +3384,14 @@
       </p:sp>
       <p:sp>
         <p:nvSpPr>
-          <p:cNvPr id="5" name="TextBox 4"/>
-          <p:cNvSpPr txBox="1"/>
-          <p:nvPr/>
-        </p:nvSpPr>
-        <p:spPr>
-          <a:xfrm>
-            <a:off x="594360" y="3529584"/>
-            <a:ext cx="11002975" cy="685800"/>
-          </a:xfrm>
-          <a:prstGeom prst="rect">
-            <a:avLst/>
-          </a:prstGeom>
-          <a:noFill/>
-        </p:spPr>
-        <p:txBody>
-          <a:bodyPr wrap="square">
-            <a:spAutoFit/>
-          </a:bodyPr>
-          <a:lstStyle/>
-          <a:p>
-            <a:pPr algn="ctr"/>
-            <a:r>
-              <a:rPr sz="4400" b="1" i="0">
-                <a:solidFill>
-                  <a:srgbClr val="FFFFFF"/>
-                </a:solidFill>
-                <a:latin typeface="Arial"/>
-              </a:rPr>
-              <a:t>我の泉        彼の血のほかなく</a:t>
-            </a:r>
-          </a:p>
-        </p:txBody>
-      </p:sp>
-      <p:sp>
-        <p:nvSpPr>
-          <p:cNvPr id="6" name="TextBox 5"/>
-          <p:cNvSpPr txBox="1"/>
-          <p:nvPr/>
-        </p:nvSpPr>
-        <p:spPr>
-          <a:xfrm>
-            <a:off x="594360" y="4251960"/>
-            <a:ext cx="11002975" cy="384048"/>
-          </a:xfrm>
-          <a:prstGeom prst="rect">
-            <a:avLst/>
-          </a:prstGeom>
-          <a:noFill/>
-        </p:spPr>
-        <p:txBody>
-          <a:bodyPr wrap="square">
-            <a:spAutoFit/>
-          </a:bodyPr>
-          <a:lstStyle/>
-          <a:p>
-            <a:pPr algn="ctr"/>
-            <a:r>
-              <a:rPr sz="2400" b="0" i="1">
-                <a:solidFill>
-                  <a:srgbClr val="B4B4B4"/>
-                </a:solidFill>
-                <a:latin typeface="Arial"/>
-              </a:rPr>
-              <a:t>ware no izumi kano chino hoka naku</a:t>
-            </a:r>
-          </a:p>
-        </p:txBody>
-      </p:sp>
-      <p:sp>
-        <p:nvSpPr>
           <p:cNvPr id="7" name="TextBox 6"/>
           <p:cNvSpPr txBox="1"/>
           <p:nvPr/>
         </p:nvSpPr>
         <p:spPr>
           <a:xfrm>
-            <a:off x="594360" y="4672584"/>
-            <a:ext cx="11002975" cy="347472"/>
+            <a:off x="640080" y="4896612"/>
+            <a:ext cx="10911535" cy="310896"/>
           </a:xfrm>
           <a:prstGeom prst="rect">
             <a:avLst/>
@@ -3478,7 +3408,7 @@
             <a:r>
               <a:rPr sz="2000" b="0" i="1">
                 <a:solidFill>
-                  <a:srgbClr val="8C8C8C"/>
+                  <a:srgbClr val="828282"/>
                 </a:solidFill>
                 <a:latin typeface="Arial"/>
               </a:rPr>
@@ -3521,23 +3451,23 @@
         </p:nvSpPr>
         <p:spPr>
           <a:xfrm>
-            <a:off x="594360" y="1837944"/>
-            <a:ext cx="11002975" cy="685800"/>
-          </a:xfrm>
-          <a:prstGeom prst="rect">
-            <a:avLst/>
-          </a:prstGeom>
-          <a:noFill/>
-        </p:spPr>
-        <p:txBody>
-          <a:bodyPr wrap="square">
-            <a:spAutoFit/>
-          </a:bodyPr>
-          <a:lstStyle/>
-          <a:p>
-            <a:pPr algn="ctr"/>
-            <a:r>
-              <a:rPr sz="4400" b="1" i="0">
+            <a:off x="640080" y="1650492"/>
+            <a:ext cx="10911535" cy="731520"/>
+          </a:xfrm>
+          <a:prstGeom prst="rect">
+            <a:avLst/>
+          </a:prstGeom>
+          <a:noFill/>
+        </p:spPr>
+        <p:txBody>
+          <a:bodyPr wrap="square">
+            <a:spAutoFit/>
+          </a:bodyPr>
+          <a:lstStyle/>
+          <a:p>
+            <a:pPr algn="ctr"/>
+            <a:r>
+              <a:rPr sz="4800" b="1" i="0">
                 <a:solidFill>
                   <a:srgbClr val="FFFFFF"/>
                 </a:solidFill>
@@ -3556,8 +3486,8 @@
         </p:nvSpPr>
         <p:spPr>
           <a:xfrm>
-            <a:off x="594360" y="2560320"/>
-            <a:ext cx="11002975" cy="384048"/>
+            <a:off x="640080" y="2418588"/>
+            <a:ext cx="10911535" cy="365760"/>
           </a:xfrm>
           <a:prstGeom prst="rect">
             <a:avLst/>
@@ -3574,7 +3504,7 @@
             <a:r>
               <a:rPr sz="2400" b="0" i="1">
                 <a:solidFill>
-                  <a:srgbClr val="B4B4B4"/>
+                  <a:srgbClr val="AAAAAA"/>
                 </a:solidFill>
                 <a:latin typeface="Arial"/>
               </a:rPr>
@@ -3591,8 +3521,78 @@
         </p:nvSpPr>
         <p:spPr>
           <a:xfrm>
-            <a:off x="594360" y="2980944"/>
-            <a:ext cx="11002975" cy="347472"/>
+            <a:off x="640080" y="2985516"/>
+            <a:ext cx="10911535" cy="731520"/>
+          </a:xfrm>
+          <a:prstGeom prst="rect">
+            <a:avLst/>
+          </a:prstGeom>
+          <a:noFill/>
+        </p:spPr>
+        <p:txBody>
+          <a:bodyPr wrap="square">
+            <a:spAutoFit/>
+          </a:bodyPr>
+          <a:lstStyle/>
+          <a:p>
+            <a:pPr algn="ctr"/>
+            <a:r>
+              <a:rPr sz="4800" b="1" i="0">
+                <a:solidFill>
+                  <a:srgbClr val="FFFFFF"/>
+                </a:solidFill>
+                <a:latin typeface="Arial"/>
+              </a:rPr>
+              <a:t>我 清めうるは        彼の血のほかなく</a:t>
+            </a:r>
+          </a:p>
+        </p:txBody>
+      </p:sp>
+      <p:sp>
+        <p:nvSpPr>
+          <p:cNvPr id="5" name="TextBox 4"/>
+          <p:cNvSpPr txBox="1"/>
+          <p:nvPr/>
+        </p:nvSpPr>
+        <p:spPr>
+          <a:xfrm>
+            <a:off x="640080" y="3753612"/>
+            <a:ext cx="10911535" cy="365760"/>
+          </a:xfrm>
+          <a:prstGeom prst="rect">
+            <a:avLst/>
+          </a:prstGeom>
+          <a:noFill/>
+        </p:spPr>
+        <p:txBody>
+          <a:bodyPr wrap="square">
+            <a:spAutoFit/>
+          </a:bodyPr>
+          <a:lstStyle/>
+          <a:p>
+            <a:pPr algn="ctr"/>
+            <a:r>
+              <a:rPr sz="2400" b="0" i="1">
+                <a:solidFill>
+                  <a:srgbClr val="AAAAAA"/>
+                </a:solidFill>
+                <a:latin typeface="Arial"/>
+              </a:rPr>
+              <a:t>ware kiyome uruwa kano chino hoka naku</a:t>
+            </a:r>
+          </a:p>
+        </p:txBody>
+      </p:sp>
+      <p:sp>
+        <p:nvSpPr>
+          <p:cNvPr id="6" name="TextBox 5"/>
+          <p:cNvSpPr txBox="1"/>
+          <p:nvPr/>
+        </p:nvSpPr>
+        <p:spPr>
+          <a:xfrm>
+            <a:off x="640080" y="4530852"/>
+            <a:ext cx="10911535" cy="310896"/>
           </a:xfrm>
           <a:prstGeom prst="rect">
             <a:avLst/>
@@ -3609,81 +3609,11 @@
             <a:r>
               <a:rPr sz="2000" b="0" i="1">
                 <a:solidFill>
-                  <a:srgbClr val="8C8C8C"/>
-                </a:solidFill>
-                <a:latin typeface="Arial"/>
-              </a:rPr>
-              <a:t/>
-            </a:r>
-          </a:p>
-        </p:txBody>
-      </p:sp>
-      <p:sp>
-        <p:nvSpPr>
-          <p:cNvPr id="5" name="TextBox 4"/>
-          <p:cNvSpPr txBox="1"/>
-          <p:nvPr/>
-        </p:nvSpPr>
-        <p:spPr>
-          <a:xfrm>
-            <a:off x="594360" y="3529584"/>
-            <a:ext cx="11002975" cy="685800"/>
-          </a:xfrm>
-          <a:prstGeom prst="rect">
-            <a:avLst/>
-          </a:prstGeom>
-          <a:noFill/>
-        </p:spPr>
-        <p:txBody>
-          <a:bodyPr wrap="square">
-            <a:spAutoFit/>
-          </a:bodyPr>
-          <a:lstStyle/>
-          <a:p>
-            <a:pPr algn="ctr"/>
-            <a:r>
-              <a:rPr sz="4400" b="1" i="0">
-                <a:solidFill>
-                  <a:srgbClr val="FFFFFF"/>
-                </a:solidFill>
-                <a:latin typeface="Arial"/>
-              </a:rPr>
-              <a:t>我 清めうるは        彼の血のほかなく</a:t>
-            </a:r>
-          </a:p>
-        </p:txBody>
-      </p:sp>
-      <p:sp>
-        <p:nvSpPr>
-          <p:cNvPr id="6" name="TextBox 5"/>
-          <p:cNvSpPr txBox="1"/>
-          <p:nvPr/>
-        </p:nvSpPr>
-        <p:spPr>
-          <a:xfrm>
-            <a:off x="594360" y="4251960"/>
-            <a:ext cx="11002975" cy="384048"/>
-          </a:xfrm>
-          <a:prstGeom prst="rect">
-            <a:avLst/>
-          </a:prstGeom>
-          <a:noFill/>
-        </p:spPr>
-        <p:txBody>
-          <a:bodyPr wrap="square">
-            <a:spAutoFit/>
-          </a:bodyPr>
-          <a:lstStyle/>
-          <a:p>
-            <a:pPr algn="ctr"/>
-            <a:r>
-              <a:rPr sz="2400" b="0" i="1">
-                <a:solidFill>
-                  <a:srgbClr val="B4B4B4"/>
-                </a:solidFill>
-                <a:latin typeface="Arial"/>
-              </a:rPr>
-              <a:t>ware kiyome uruwa kano chino hoka naku</a:t>
+                  <a:srgbClr val="828282"/>
+                </a:solidFill>
+                <a:latin typeface="Arial"/>
+              </a:rPr>
+              <a:t>Nada Além do Sangue</a:t>
             </a:r>
           </a:p>
         </p:txBody>
@@ -3696,8 +3626,8 @@
         </p:nvSpPr>
         <p:spPr>
           <a:xfrm>
-            <a:off x="594360" y="4672584"/>
-            <a:ext cx="11002975" cy="347472"/>
+            <a:off x="640080" y="4896612"/>
+            <a:ext cx="10911535" cy="310896"/>
           </a:xfrm>
           <a:prstGeom prst="rect">
             <a:avLst/>
@@ -3714,11 +3644,11 @@
             <a:r>
               <a:rPr sz="2000" b="0" i="1">
                 <a:solidFill>
-                  <a:srgbClr val="8C8C8C"/>
-                </a:solidFill>
-                <a:latin typeface="Arial"/>
-              </a:rPr>
-              <a:t/>
+                  <a:srgbClr val="828282"/>
+                </a:solidFill>
+                <a:latin typeface="Arial"/>
+              </a:rPr>
+              <a:t>Teu sangue</a:t>
             </a:r>
           </a:p>
         </p:txBody>
@@ -3757,23 +3687,23 @@
         </p:nvSpPr>
         <p:spPr>
           <a:xfrm>
-            <a:off x="594360" y="1837944"/>
-            <a:ext cx="11002975" cy="685800"/>
-          </a:xfrm>
-          <a:prstGeom prst="rect">
-            <a:avLst/>
-          </a:prstGeom>
-          <a:noFill/>
-        </p:spPr>
-        <p:txBody>
-          <a:bodyPr wrap="square">
-            <a:spAutoFit/>
-          </a:bodyPr>
-          <a:lstStyle/>
-          <a:p>
-            <a:pPr algn="ctr"/>
-            <a:r>
-              <a:rPr sz="4400" b="1" i="0">
+            <a:off x="640080" y="1650492"/>
+            <a:ext cx="10911535" cy="731520"/>
+          </a:xfrm>
+          <a:prstGeom prst="rect">
+            <a:avLst/>
+          </a:prstGeom>
+          <a:noFill/>
+        </p:spPr>
+        <p:txBody>
+          <a:bodyPr wrap="square">
+            <a:spAutoFit/>
+          </a:bodyPr>
+          <a:lstStyle/>
+          <a:p>
+            <a:pPr algn="ctr"/>
+            <a:r>
+              <a:rPr sz="4800" b="1" i="0">
                 <a:solidFill>
                   <a:srgbClr val="FFFFFF"/>
                 </a:solidFill>
@@ -3792,8 +3722,8 @@
         </p:nvSpPr>
         <p:spPr>
           <a:xfrm>
-            <a:off x="594360" y="2560320"/>
-            <a:ext cx="11002975" cy="384048"/>
+            <a:off x="640080" y="2418588"/>
+            <a:ext cx="10911535" cy="365760"/>
           </a:xfrm>
           <a:prstGeom prst="rect">
             <a:avLst/>
@@ -3810,7 +3740,7 @@
             <a:r>
               <a:rPr sz="2400" b="0" i="1">
                 <a:solidFill>
-                  <a:srgbClr val="B4B4B4"/>
+                  <a:srgbClr val="AAAAAA"/>
                 </a:solidFill>
                 <a:latin typeface="Arial"/>
               </a:rPr>
@@ -3827,8 +3757,78 @@
         </p:nvSpPr>
         <p:spPr>
           <a:xfrm>
-            <a:off x="594360" y="2980944"/>
-            <a:ext cx="11002975" cy="347472"/>
+            <a:off x="640080" y="2985516"/>
+            <a:ext cx="10911535" cy="731520"/>
+          </a:xfrm>
+          <a:prstGeom prst="rect">
+            <a:avLst/>
+          </a:prstGeom>
+          <a:noFill/>
+        </p:spPr>
+        <p:txBody>
+          <a:bodyPr wrap="square">
+            <a:spAutoFit/>
+          </a:bodyPr>
+          <a:lstStyle/>
+          <a:p>
+            <a:pPr algn="ctr"/>
+            <a:r>
+              <a:rPr sz="4800" b="1" i="0">
+                <a:solidFill>
+                  <a:srgbClr val="FFFFFF"/>
+                </a:solidFill>
+                <a:latin typeface="Arial"/>
+              </a:rPr>
+              <a:t>我の泉         彼の血のほかなく</a:t>
+            </a:r>
+          </a:p>
+        </p:txBody>
+      </p:sp>
+      <p:sp>
+        <p:nvSpPr>
+          <p:cNvPr id="5" name="TextBox 4"/>
+          <p:cNvSpPr txBox="1"/>
+          <p:nvPr/>
+        </p:nvSpPr>
+        <p:spPr>
+          <a:xfrm>
+            <a:off x="640080" y="3753612"/>
+            <a:ext cx="10911535" cy="365760"/>
+          </a:xfrm>
+          <a:prstGeom prst="rect">
+            <a:avLst/>
+          </a:prstGeom>
+          <a:noFill/>
+        </p:spPr>
+        <p:txBody>
+          <a:bodyPr wrap="square">
+            <a:spAutoFit/>
+          </a:bodyPr>
+          <a:lstStyle/>
+          <a:p>
+            <a:pPr algn="ctr"/>
+            <a:r>
+              <a:rPr sz="2400" b="0" i="1">
+                <a:solidFill>
+                  <a:srgbClr val="AAAAAA"/>
+                </a:solidFill>
+                <a:latin typeface="Arial"/>
+              </a:rPr>
+              <a:t>ware no izumi kano chino hoka naku</a:t>
+            </a:r>
+          </a:p>
+        </p:txBody>
+      </p:sp>
+      <p:sp>
+        <p:nvSpPr>
+          <p:cNvPr id="6" name="TextBox 5"/>
+          <p:cNvSpPr txBox="1"/>
+          <p:nvPr/>
+        </p:nvSpPr>
+        <p:spPr>
+          <a:xfrm>
+            <a:off x="640080" y="4530852"/>
+            <a:ext cx="10911535" cy="310896"/>
           </a:xfrm>
           <a:prstGeom prst="rect">
             <a:avLst/>
@@ -3845,7 +3845,7 @@
             <a:r>
               <a:rPr sz="2000" b="0" i="1">
                 <a:solidFill>
-                  <a:srgbClr val="8C8C8C"/>
+                  <a:srgbClr val="828282"/>
                 </a:solidFill>
                 <a:latin typeface="Arial"/>
               </a:rPr>
@@ -3856,84 +3856,14 @@
       </p:sp>
       <p:sp>
         <p:nvSpPr>
-          <p:cNvPr id="5" name="TextBox 4"/>
-          <p:cNvSpPr txBox="1"/>
-          <p:nvPr/>
-        </p:nvSpPr>
-        <p:spPr>
-          <a:xfrm>
-            <a:off x="594360" y="3529584"/>
-            <a:ext cx="11002975" cy="685800"/>
-          </a:xfrm>
-          <a:prstGeom prst="rect">
-            <a:avLst/>
-          </a:prstGeom>
-          <a:noFill/>
-        </p:spPr>
-        <p:txBody>
-          <a:bodyPr wrap="square">
-            <a:spAutoFit/>
-          </a:bodyPr>
-          <a:lstStyle/>
-          <a:p>
-            <a:pPr algn="ctr"/>
-            <a:r>
-              <a:rPr sz="4400" b="1" i="0">
-                <a:solidFill>
-                  <a:srgbClr val="FFFFFF"/>
-                </a:solidFill>
-                <a:latin typeface="Arial"/>
-              </a:rPr>
-              <a:t>我の泉         彼の血のほかなく</a:t>
-            </a:r>
-          </a:p>
-        </p:txBody>
-      </p:sp>
-      <p:sp>
-        <p:nvSpPr>
-          <p:cNvPr id="6" name="TextBox 5"/>
-          <p:cNvSpPr txBox="1"/>
-          <p:nvPr/>
-        </p:nvSpPr>
-        <p:spPr>
-          <a:xfrm>
-            <a:off x="594360" y="4251960"/>
-            <a:ext cx="11002975" cy="384048"/>
-          </a:xfrm>
-          <a:prstGeom prst="rect">
-            <a:avLst/>
-          </a:prstGeom>
-          <a:noFill/>
-        </p:spPr>
-        <p:txBody>
-          <a:bodyPr wrap="square">
-            <a:spAutoFit/>
-          </a:bodyPr>
-          <a:lstStyle/>
-          <a:p>
-            <a:pPr algn="ctr"/>
-            <a:r>
-              <a:rPr sz="2400" b="0" i="1">
-                <a:solidFill>
-                  <a:srgbClr val="B4B4B4"/>
-                </a:solidFill>
-                <a:latin typeface="Arial"/>
-              </a:rPr>
-              <a:t>ware no izumi kano chino hoka naku</a:t>
-            </a:r>
-          </a:p>
-        </p:txBody>
-      </p:sp>
-      <p:sp>
-        <p:nvSpPr>
           <p:cNvPr id="7" name="TextBox 6"/>
           <p:cNvSpPr txBox="1"/>
           <p:nvPr/>
         </p:nvSpPr>
         <p:spPr>
           <a:xfrm>
-            <a:off x="594360" y="4672584"/>
-            <a:ext cx="11002975" cy="347472"/>
+            <a:off x="640080" y="4896612"/>
+            <a:ext cx="10911535" cy="310896"/>
           </a:xfrm>
           <a:prstGeom prst="rect">
             <a:avLst/>
@@ -3950,7 +3880,7 @@
             <a:r>
               <a:rPr sz="2000" b="0" i="1">
                 <a:solidFill>
-                  <a:srgbClr val="8C8C8C"/>
+                  <a:srgbClr val="828282"/>
                 </a:solidFill>
                 <a:latin typeface="Arial"/>
               </a:rPr>
@@ -3993,23 +3923,23 @@
         </p:nvSpPr>
         <p:spPr>
           <a:xfrm>
-            <a:off x="594360" y="1837944"/>
-            <a:ext cx="11002975" cy="685800"/>
-          </a:xfrm>
-          <a:prstGeom prst="rect">
-            <a:avLst/>
-          </a:prstGeom>
-          <a:noFill/>
-        </p:spPr>
-        <p:txBody>
-          <a:bodyPr wrap="square">
-            <a:spAutoFit/>
-          </a:bodyPr>
-          <a:lstStyle/>
-          <a:p>
-            <a:pPr algn="ctr"/>
-            <a:r>
-              <a:rPr sz="4400" b="1" i="0">
+            <a:off x="640080" y="1650492"/>
+            <a:ext cx="10911535" cy="731520"/>
+          </a:xfrm>
+          <a:prstGeom prst="rect">
+            <a:avLst/>
+          </a:prstGeom>
+          <a:noFill/>
+        </p:spPr>
+        <p:txBody>
+          <a:bodyPr wrap="square">
+            <a:spAutoFit/>
+          </a:bodyPr>
+          <a:lstStyle/>
+          <a:p>
+            <a:pPr algn="ctr"/>
+            <a:r>
+              <a:rPr sz="4800" b="1" i="0">
                 <a:solidFill>
                   <a:srgbClr val="FFFFFF"/>
                 </a:solidFill>
@@ -4028,8 +3958,8 @@
         </p:nvSpPr>
         <p:spPr>
           <a:xfrm>
-            <a:off x="594360" y="2560320"/>
-            <a:ext cx="11002975" cy="384048"/>
+            <a:off x="640080" y="2418588"/>
+            <a:ext cx="10911535" cy="365760"/>
           </a:xfrm>
           <a:prstGeom prst="rect">
             <a:avLst/>
@@ -4046,7 +3976,7 @@
             <a:r>
               <a:rPr sz="2400" b="0" i="1">
                 <a:solidFill>
-                  <a:srgbClr val="B4B4B4"/>
+                  <a:srgbClr val="AAAAAA"/>
                 </a:solidFill>
                 <a:latin typeface="Arial"/>
               </a:rPr>
@@ -4063,8 +3993,78 @@
         </p:nvSpPr>
         <p:spPr>
           <a:xfrm>
-            <a:off x="594360" y="2980944"/>
-            <a:ext cx="11002975" cy="347472"/>
+            <a:off x="640080" y="2985516"/>
+            <a:ext cx="10911535" cy="731520"/>
+          </a:xfrm>
+          <a:prstGeom prst="rect">
+            <a:avLst/>
+          </a:prstGeom>
+          <a:noFill/>
+        </p:spPr>
+        <p:txBody>
+          <a:bodyPr wrap="square">
+            <a:spAutoFit/>
+          </a:bodyPr>
+          <a:lstStyle/>
+          <a:p>
+            <a:pPr algn="ctr"/>
+            <a:r>
+              <a:rPr sz="4800" b="1" i="0">
+                <a:solidFill>
+                  <a:srgbClr val="FFFFFF"/>
+                </a:solidFill>
+                <a:latin typeface="Arial"/>
+              </a:rPr>
+              <a:t>我の泉        彼の血のほかなく</a:t>
+            </a:r>
+          </a:p>
+        </p:txBody>
+      </p:sp>
+      <p:sp>
+        <p:nvSpPr>
+          <p:cNvPr id="5" name="TextBox 4"/>
+          <p:cNvSpPr txBox="1"/>
+          <p:nvPr/>
+        </p:nvSpPr>
+        <p:spPr>
+          <a:xfrm>
+            <a:off x="640080" y="3753612"/>
+            <a:ext cx="10911535" cy="365760"/>
+          </a:xfrm>
+          <a:prstGeom prst="rect">
+            <a:avLst/>
+          </a:prstGeom>
+          <a:noFill/>
+        </p:spPr>
+        <p:txBody>
+          <a:bodyPr wrap="square">
+            <a:spAutoFit/>
+          </a:bodyPr>
+          <a:lstStyle/>
+          <a:p>
+            <a:pPr algn="ctr"/>
+            <a:r>
+              <a:rPr sz="2400" b="0" i="1">
+                <a:solidFill>
+                  <a:srgbClr val="AAAAAA"/>
+                </a:solidFill>
+                <a:latin typeface="Arial"/>
+              </a:rPr>
+              <a:t>ware no izumi  kano chino hoka naku</a:t>
+            </a:r>
+          </a:p>
+        </p:txBody>
+      </p:sp>
+      <p:sp>
+        <p:nvSpPr>
+          <p:cNvPr id="6" name="TextBox 5"/>
+          <p:cNvSpPr txBox="1"/>
+          <p:nvPr/>
+        </p:nvSpPr>
+        <p:spPr>
+          <a:xfrm>
+            <a:off x="640080" y="4530852"/>
+            <a:ext cx="10911535" cy="310896"/>
           </a:xfrm>
           <a:prstGeom prst="rect">
             <a:avLst/>
@@ -4081,81 +4081,11 @@
             <a:r>
               <a:rPr sz="2000" b="0" i="1">
                 <a:solidFill>
-                  <a:srgbClr val="8C8C8C"/>
-                </a:solidFill>
-                <a:latin typeface="Arial"/>
-              </a:rPr>
-              <a:t/>
-            </a:r>
-          </a:p>
-        </p:txBody>
-      </p:sp>
-      <p:sp>
-        <p:nvSpPr>
-          <p:cNvPr id="5" name="TextBox 4"/>
-          <p:cNvSpPr txBox="1"/>
-          <p:nvPr/>
-        </p:nvSpPr>
-        <p:spPr>
-          <a:xfrm>
-            <a:off x="594360" y="3529584"/>
-            <a:ext cx="11002975" cy="685800"/>
-          </a:xfrm>
-          <a:prstGeom prst="rect">
-            <a:avLst/>
-          </a:prstGeom>
-          <a:noFill/>
-        </p:spPr>
-        <p:txBody>
-          <a:bodyPr wrap="square">
-            <a:spAutoFit/>
-          </a:bodyPr>
-          <a:lstStyle/>
-          <a:p>
-            <a:pPr algn="ctr"/>
-            <a:r>
-              <a:rPr sz="4400" b="1" i="0">
-                <a:solidFill>
-                  <a:srgbClr val="FFFFFF"/>
-                </a:solidFill>
-                <a:latin typeface="Arial"/>
-              </a:rPr>
-              <a:t>我の泉        彼の血のほかなく</a:t>
-            </a:r>
-          </a:p>
-        </p:txBody>
-      </p:sp>
-      <p:sp>
-        <p:nvSpPr>
-          <p:cNvPr id="6" name="TextBox 5"/>
-          <p:cNvSpPr txBox="1"/>
-          <p:nvPr/>
-        </p:nvSpPr>
-        <p:spPr>
-          <a:xfrm>
-            <a:off x="594360" y="4251960"/>
-            <a:ext cx="11002975" cy="384048"/>
-          </a:xfrm>
-          <a:prstGeom prst="rect">
-            <a:avLst/>
-          </a:prstGeom>
-          <a:noFill/>
-        </p:spPr>
-        <p:txBody>
-          <a:bodyPr wrap="square">
-            <a:spAutoFit/>
-          </a:bodyPr>
-          <a:lstStyle/>
-          <a:p>
-            <a:pPr algn="ctr"/>
-            <a:r>
-              <a:rPr sz="2400" b="0" i="1">
-                <a:solidFill>
-                  <a:srgbClr val="B4B4B4"/>
-                </a:solidFill>
-                <a:latin typeface="Arial"/>
-              </a:rPr>
-              <a:t>ware no izumi  kano chino hoka naku</a:t>
+                  <a:srgbClr val="828282"/>
+                </a:solidFill>
+                <a:latin typeface="Arial"/>
+              </a:rPr>
+              <a:t>Leva-me além, a todas as alturas</a:t>
             </a:r>
           </a:p>
         </p:txBody>
@@ -4168,8 +4098,8 @@
         </p:nvSpPr>
         <p:spPr>
           <a:xfrm>
-            <a:off x="594360" y="4672584"/>
-            <a:ext cx="11002975" cy="347472"/>
+            <a:off x="640080" y="4896612"/>
+            <a:ext cx="10911535" cy="310896"/>
           </a:xfrm>
           <a:prstGeom prst="rect">
             <a:avLst/>
@@ -4186,11 +4116,11 @@
             <a:r>
               <a:rPr sz="2000" b="0" i="1">
                 <a:solidFill>
-                  <a:srgbClr val="8C8C8C"/>
-                </a:solidFill>
-                <a:latin typeface="Arial"/>
-              </a:rPr>
-              <a:t/>
+                  <a:srgbClr val="828282"/>
+                </a:solidFill>
+                <a:latin typeface="Arial"/>
+              </a:rPr>
+              <a:t>Onde ouço a Tua voz</a:t>
             </a:r>
           </a:p>
         </p:txBody>
@@ -4229,23 +4159,23 @@
         </p:nvSpPr>
         <p:spPr>
           <a:xfrm>
-            <a:off x="594360" y="2258568"/>
-            <a:ext cx="11002975" cy="685800"/>
-          </a:xfrm>
-          <a:prstGeom prst="rect">
-            <a:avLst/>
-          </a:prstGeom>
-          <a:noFill/>
-        </p:spPr>
-        <p:txBody>
-          <a:bodyPr wrap="square">
-            <a:spAutoFit/>
-          </a:bodyPr>
-          <a:lstStyle/>
-          <a:p>
-            <a:pPr algn="ctr"/>
-            <a:r>
-              <a:rPr sz="4400" b="1" i="0">
+            <a:off x="640080" y="2052828"/>
+            <a:ext cx="10911535" cy="731520"/>
+          </a:xfrm>
+          <a:prstGeom prst="rect">
+            <a:avLst/>
+          </a:prstGeom>
+          <a:noFill/>
+        </p:spPr>
+        <p:txBody>
+          <a:bodyPr wrap="square">
+            <a:spAutoFit/>
+          </a:bodyPr>
+          <a:lstStyle/>
+          <a:p>
+            <a:pPr algn="ctr"/>
+            <a:r>
+              <a:rPr sz="4800" b="1" i="0">
                 <a:solidFill>
                   <a:srgbClr val="FFFFFF"/>
                 </a:solidFill>
@@ -4264,25 +4194,60 @@
         </p:nvSpPr>
         <p:spPr>
           <a:xfrm>
-            <a:off x="594360" y="2980944"/>
-            <a:ext cx="11002975" cy="347472"/>
-          </a:xfrm>
-          <a:prstGeom prst="rect">
-            <a:avLst/>
-          </a:prstGeom>
-          <a:noFill/>
-        </p:spPr>
-        <p:txBody>
-          <a:bodyPr wrap="square">
-            <a:spAutoFit/>
-          </a:bodyPr>
-          <a:lstStyle/>
-          <a:p>
-            <a:pPr algn="ctr"/>
-            <a:r>
-              <a:rPr sz="2200" b="0" i="1">
-                <a:solidFill>
-                  <a:srgbClr val="8C8C8C"/>
+            <a:off x="640080" y="2985516"/>
+            <a:ext cx="10911535" cy="731520"/>
+          </a:xfrm>
+          <a:prstGeom prst="rect">
+            <a:avLst/>
+          </a:prstGeom>
+          <a:noFill/>
+        </p:spPr>
+        <p:txBody>
+          <a:bodyPr wrap="square">
+            <a:spAutoFit/>
+          </a:bodyPr>
+          <a:lstStyle/>
+          <a:p>
+            <a:pPr algn="ctr"/>
+            <a:r>
+              <a:rPr sz="4800" b="1" i="0">
+                <a:solidFill>
+                  <a:srgbClr val="FFFFFF"/>
+                </a:solidFill>
+                <a:latin typeface="Arial"/>
+              </a:rPr>
+              <a:t>Onde ouço a Tua voz</a:t>
+            </a:r>
+          </a:p>
+        </p:txBody>
+      </p:sp>
+      <p:sp>
+        <p:nvSpPr>
+          <p:cNvPr id="4" name="TextBox 3"/>
+          <p:cNvSpPr txBox="1"/>
+          <p:nvPr/>
+        </p:nvSpPr>
+        <p:spPr>
+          <a:xfrm>
+            <a:off x="640080" y="4128516"/>
+            <a:ext cx="10911535" cy="310896"/>
+          </a:xfrm>
+          <a:prstGeom prst="rect">
+            <a:avLst/>
+          </a:prstGeom>
+          <a:noFill/>
+        </p:spPr>
+        <p:txBody>
+          <a:bodyPr wrap="square">
+            <a:spAutoFit/>
+          </a:bodyPr>
+          <a:lstStyle/>
+          <a:p>
+            <a:pPr algn="ctr"/>
+            <a:r>
+              <a:rPr sz="2000" b="0" i="0">
+                <a:solidFill>
+                  <a:srgbClr val="828282"/>
                 </a:solidFill>
                 <a:latin typeface="Arial"/>
               </a:rPr>
@@ -4293,66 +4258,31 @@
       </p:sp>
       <p:sp>
         <p:nvSpPr>
-          <p:cNvPr id="4" name="TextBox 3"/>
-          <p:cNvSpPr txBox="1"/>
-          <p:nvPr/>
-        </p:nvSpPr>
-        <p:spPr>
-          <a:xfrm>
-            <a:off x="594360" y="3529584"/>
-            <a:ext cx="11002975" cy="685800"/>
-          </a:xfrm>
-          <a:prstGeom prst="rect">
-            <a:avLst/>
-          </a:prstGeom>
-          <a:noFill/>
-        </p:spPr>
-        <p:txBody>
-          <a:bodyPr wrap="square">
-            <a:spAutoFit/>
-          </a:bodyPr>
-          <a:lstStyle/>
-          <a:p>
-            <a:pPr algn="ctr"/>
-            <a:r>
-              <a:rPr sz="4400" b="1" i="0">
-                <a:solidFill>
-                  <a:srgbClr val="FFFFFF"/>
-                </a:solidFill>
-                <a:latin typeface="Arial"/>
-              </a:rPr>
-              <a:t>Onde ouço a Tua voz</a:t>
-            </a:r>
-          </a:p>
-        </p:txBody>
-      </p:sp>
-      <p:sp>
-        <p:nvSpPr>
           <p:cNvPr id="5" name="TextBox 4"/>
           <p:cNvSpPr txBox="1"/>
           <p:nvPr/>
         </p:nvSpPr>
         <p:spPr>
           <a:xfrm>
-            <a:off x="594360" y="4251960"/>
-            <a:ext cx="11002975" cy="347472"/>
-          </a:xfrm>
-          <a:prstGeom prst="rect">
-            <a:avLst/>
-          </a:prstGeom>
-          <a:noFill/>
-        </p:spPr>
-        <p:txBody>
-          <a:bodyPr wrap="square">
-            <a:spAutoFit/>
-          </a:bodyPr>
-          <a:lstStyle/>
-          <a:p>
-            <a:pPr algn="ctr"/>
-            <a:r>
-              <a:rPr sz="2200" b="0" i="1">
-                <a:solidFill>
-                  <a:srgbClr val="8C8C8C"/>
+            <a:off x="640080" y="4494276"/>
+            <a:ext cx="10911535" cy="310896"/>
+          </a:xfrm>
+          <a:prstGeom prst="rect">
+            <a:avLst/>
+          </a:prstGeom>
+          <a:noFill/>
+        </p:spPr>
+        <p:txBody>
+          <a:bodyPr wrap="square">
+            <a:spAutoFit/>
+          </a:bodyPr>
+          <a:lstStyle/>
+          <a:p>
+            <a:pPr algn="ctr"/>
+            <a:r>
+              <a:rPr sz="2000" b="0" i="0">
+                <a:solidFill>
+                  <a:srgbClr val="828282"/>
                 </a:solidFill>
                 <a:latin typeface="Arial"/>
               </a:rPr>
@@ -4395,23 +4325,23 @@
         </p:nvSpPr>
         <p:spPr>
           <a:xfrm>
-            <a:off x="594360" y="2258568"/>
-            <a:ext cx="11002975" cy="685800"/>
-          </a:xfrm>
-          <a:prstGeom prst="rect">
-            <a:avLst/>
-          </a:prstGeom>
-          <a:noFill/>
-        </p:spPr>
-        <p:txBody>
-          <a:bodyPr wrap="square">
-            <a:spAutoFit/>
-          </a:bodyPr>
-          <a:lstStyle/>
-          <a:p>
-            <a:pPr algn="ctr"/>
-            <a:r>
-              <a:rPr sz="4400" b="1" i="0">
+            <a:off x="640080" y="2052828"/>
+            <a:ext cx="10911535" cy="731520"/>
+          </a:xfrm>
+          <a:prstGeom prst="rect">
+            <a:avLst/>
+          </a:prstGeom>
+          <a:noFill/>
+        </p:spPr>
+        <p:txBody>
+          <a:bodyPr wrap="square">
+            <a:spAutoFit/>
+          </a:bodyPr>
+          <a:lstStyle/>
+          <a:p>
+            <a:pPr algn="ctr"/>
+            <a:r>
+              <a:rPr sz="4800" b="1" i="0">
                 <a:solidFill>
                   <a:srgbClr val="FFFFFF"/>
                 </a:solidFill>
@@ -4430,25 +4360,60 @@
         </p:nvSpPr>
         <p:spPr>
           <a:xfrm>
-            <a:off x="594360" y="2980944"/>
-            <a:ext cx="11002975" cy="347472"/>
-          </a:xfrm>
-          <a:prstGeom prst="rect">
-            <a:avLst/>
-          </a:prstGeom>
-          <a:noFill/>
-        </p:spPr>
-        <p:txBody>
-          <a:bodyPr wrap="square">
-            <a:spAutoFit/>
-          </a:bodyPr>
-          <a:lstStyle/>
-          <a:p>
-            <a:pPr algn="ctr"/>
-            <a:r>
-              <a:rPr sz="2200" b="0" i="1">
-                <a:solidFill>
-                  <a:srgbClr val="8C8C8C"/>
+            <a:off x="640080" y="2985516"/>
+            <a:ext cx="10911535" cy="731520"/>
+          </a:xfrm>
+          <a:prstGeom prst="rect">
+            <a:avLst/>
+          </a:prstGeom>
+          <a:noFill/>
+        </p:spPr>
+        <p:txBody>
+          <a:bodyPr wrap="square">
+            <a:spAutoFit/>
+          </a:bodyPr>
+          <a:lstStyle/>
+          <a:p>
+            <a:pPr algn="ctr"/>
+            <a:r>
+              <a:rPr sz="4100" b="1" i="0">
+                <a:solidFill>
+                  <a:srgbClr val="FFFFFF"/>
+                </a:solidFill>
+                <a:latin typeface="Arial"/>
+              </a:rPr>
+              <a:t>Mostra tua graça, fala do amor do Pai</a:t>
+            </a:r>
+          </a:p>
+        </p:txBody>
+      </p:sp>
+      <p:sp>
+        <p:nvSpPr>
+          <p:cNvPr id="4" name="TextBox 3"/>
+          <p:cNvSpPr txBox="1"/>
+          <p:nvPr/>
+        </p:nvSpPr>
+        <p:spPr>
+          <a:xfrm>
+            <a:off x="640080" y="4128516"/>
+            <a:ext cx="10911535" cy="310896"/>
+          </a:xfrm>
+          <a:prstGeom prst="rect">
+            <a:avLst/>
+          </a:prstGeom>
+          <a:noFill/>
+        </p:spPr>
+        <p:txBody>
+          <a:bodyPr wrap="square">
+            <a:spAutoFit/>
+          </a:bodyPr>
+          <a:lstStyle/>
+          <a:p>
+            <a:pPr algn="ctr"/>
+            <a:r>
+              <a:rPr sz="2000" b="0" i="0">
+                <a:solidFill>
+                  <a:srgbClr val="828282"/>
                 </a:solidFill>
                 <a:latin typeface="Arial"/>
               </a:rPr>
@@ -4459,66 +4424,31 @@
       </p:sp>
       <p:sp>
         <p:nvSpPr>
-          <p:cNvPr id="4" name="TextBox 3"/>
-          <p:cNvSpPr txBox="1"/>
-          <p:nvPr/>
-        </p:nvSpPr>
-        <p:spPr>
-          <a:xfrm>
-            <a:off x="594360" y="3529584"/>
-            <a:ext cx="11002975" cy="685800"/>
-          </a:xfrm>
-          <a:prstGeom prst="rect">
-            <a:avLst/>
-          </a:prstGeom>
-          <a:noFill/>
-        </p:spPr>
-        <p:txBody>
-          <a:bodyPr wrap="square">
-            <a:spAutoFit/>
-          </a:bodyPr>
-          <a:lstStyle/>
-          <a:p>
-            <a:pPr algn="ctr"/>
-            <a:r>
-              <a:rPr sz="3805" b="1" i="0">
-                <a:solidFill>
-                  <a:srgbClr val="FFFFFF"/>
-                </a:solidFill>
-                <a:latin typeface="Arial"/>
-              </a:rPr>
-              <a:t>Mostra tua graça, fala do amor do Pai</a:t>
-            </a:r>
-          </a:p>
-        </p:txBody>
-      </p:sp>
-      <p:sp>
-        <p:nvSpPr>
           <p:cNvPr id="5" name="TextBox 4"/>
           <p:cNvSpPr txBox="1"/>
           <p:nvPr/>
         </p:nvSpPr>
         <p:spPr>
           <a:xfrm>
-            <a:off x="594360" y="4251960"/>
-            <a:ext cx="11002975" cy="347472"/>
-          </a:xfrm>
-          <a:prstGeom prst="rect">
-            <a:avLst/>
-          </a:prstGeom>
-          <a:noFill/>
-        </p:spPr>
-        <p:txBody>
-          <a:bodyPr wrap="square">
-            <a:spAutoFit/>
-          </a:bodyPr>
-          <a:lstStyle/>
-          <a:p>
-            <a:pPr algn="ctr"/>
-            <a:r>
-              <a:rPr sz="2200" b="0" i="1">
-                <a:solidFill>
-                  <a:srgbClr val="8C8C8C"/>
+            <a:off x="640080" y="4494276"/>
+            <a:ext cx="10911535" cy="310896"/>
+          </a:xfrm>
+          <a:prstGeom prst="rect">
+            <a:avLst/>
+          </a:prstGeom>
+          <a:noFill/>
+        </p:spPr>
+        <p:txBody>
+          <a:bodyPr wrap="square">
+            <a:spAutoFit/>
+          </a:bodyPr>
+          <a:lstStyle/>
+          <a:p>
+            <a:pPr algn="ctr"/>
+            <a:r>
+              <a:rPr sz="2000" b="0" i="0">
+                <a:solidFill>
+                  <a:srgbClr val="828282"/>
                 </a:solidFill>
                 <a:latin typeface="Arial"/>
               </a:rPr>
@@ -4561,23 +4491,23 @@
         </p:nvSpPr>
         <p:spPr>
           <a:xfrm>
-            <a:off x="594360" y="2258568"/>
-            <a:ext cx="11002975" cy="685800"/>
-          </a:xfrm>
-          <a:prstGeom prst="rect">
-            <a:avLst/>
-          </a:prstGeom>
-          <a:noFill/>
-        </p:spPr>
-        <p:txBody>
-          <a:bodyPr wrap="square">
-            <a:spAutoFit/>
-          </a:bodyPr>
-          <a:lstStyle/>
-          <a:p>
-            <a:pPr algn="ctr"/>
-            <a:r>
-              <a:rPr sz="4400" b="1" i="0">
+            <a:off x="640080" y="2052828"/>
+            <a:ext cx="10911535" cy="731520"/>
+          </a:xfrm>
+          <a:prstGeom prst="rect">
+            <a:avLst/>
+          </a:prstGeom>
+          <a:noFill/>
+        </p:spPr>
+        <p:txBody>
+          <a:bodyPr wrap="square">
+            <a:spAutoFit/>
+          </a:bodyPr>
+          <a:lstStyle/>
+          <a:p>
+            <a:pPr algn="ctr"/>
+            <a:r>
+              <a:rPr sz="4800" b="1" i="0">
                 <a:solidFill>
                   <a:srgbClr val="FFFFFF"/>
                 </a:solidFill>
@@ -4596,29 +4526,29 @@
         </p:nvSpPr>
         <p:spPr>
           <a:xfrm>
-            <a:off x="594360" y="2980944"/>
-            <a:ext cx="11002975" cy="347472"/>
-          </a:xfrm>
-          <a:prstGeom prst="rect">
-            <a:avLst/>
-          </a:prstGeom>
-          <a:noFill/>
-        </p:spPr>
-        <p:txBody>
-          <a:bodyPr wrap="square">
-            <a:spAutoFit/>
-          </a:bodyPr>
-          <a:lstStyle/>
-          <a:p>
-            <a:pPr algn="ctr"/>
-            <a:r>
-              <a:rPr sz="2200" b="0" i="1">
-                <a:solidFill>
-                  <a:srgbClr val="8C8C8C"/>
-                </a:solidFill>
-                <a:latin typeface="Arial"/>
-              </a:rPr>
-              <a:t/>
+            <a:off x="640080" y="2985516"/>
+            <a:ext cx="10911535" cy="731520"/>
+          </a:xfrm>
+          <a:prstGeom prst="rect">
+            <a:avLst/>
+          </a:prstGeom>
+          <a:noFill/>
+        </p:spPr>
+        <p:txBody>
+          <a:bodyPr wrap="square">
+            <a:spAutoFit/>
+          </a:bodyPr>
+          <a:lstStyle/>
+          <a:p>
+            <a:pPr algn="ctr"/>
+            <a:r>
+              <a:rPr sz="4800" b="1" i="0">
+                <a:solidFill>
+                  <a:srgbClr val="FFFFFF"/>
+                </a:solidFill>
+                <a:latin typeface="Arial"/>
+              </a:rPr>
+              <a:t>Que nos lava dos pecados</a:t>
             </a:r>
           </a:p>
         </p:txBody>
@@ -4631,29 +4561,29 @@
         </p:nvSpPr>
         <p:spPr>
           <a:xfrm>
-            <a:off x="594360" y="3529584"/>
-            <a:ext cx="11002975" cy="685800"/>
-          </a:xfrm>
-          <a:prstGeom prst="rect">
-            <a:avLst/>
-          </a:prstGeom>
-          <a:noFill/>
-        </p:spPr>
-        <p:txBody>
-          <a:bodyPr wrap="square">
-            <a:spAutoFit/>
-          </a:bodyPr>
-          <a:lstStyle/>
-          <a:p>
-            <a:pPr algn="ctr"/>
-            <a:r>
-              <a:rPr sz="4400" b="1" i="0">
-                <a:solidFill>
-                  <a:srgbClr val="FFFFFF"/>
-                </a:solidFill>
-                <a:latin typeface="Arial"/>
-              </a:rPr>
-              <a:t>Que nos lava dos pecados</a:t>
+            <a:off x="640080" y="4128516"/>
+            <a:ext cx="10911535" cy="310896"/>
+          </a:xfrm>
+          <a:prstGeom prst="rect">
+            <a:avLst/>
+          </a:prstGeom>
+          <a:noFill/>
+        </p:spPr>
+        <p:txBody>
+          <a:bodyPr wrap="square">
+            <a:spAutoFit/>
+          </a:bodyPr>
+          <a:lstStyle/>
+          <a:p>
+            <a:pPr algn="ctr"/>
+            <a:r>
+              <a:rPr sz="2000" b="0" i="0">
+                <a:solidFill>
+                  <a:srgbClr val="828282"/>
+                </a:solidFill>
+                <a:latin typeface="Arial"/>
+              </a:rPr>
+              <a:t>雪のように     真っ白に染むる</a:t>
             </a:r>
           </a:p>
         </p:txBody>
@@ -4666,29 +4596,29 @@
         </p:nvSpPr>
         <p:spPr>
           <a:xfrm>
-            <a:off x="594360" y="4251960"/>
-            <a:ext cx="11002975" cy="347472"/>
-          </a:xfrm>
-          <a:prstGeom prst="rect">
-            <a:avLst/>
-          </a:prstGeom>
-          <a:noFill/>
-        </p:spPr>
-        <p:txBody>
-          <a:bodyPr wrap="square">
-            <a:spAutoFit/>
-          </a:bodyPr>
-          <a:lstStyle/>
-          <a:p>
-            <a:pPr algn="ctr"/>
-            <a:r>
-              <a:rPr sz="2200" b="0" i="1">
-                <a:solidFill>
-                  <a:srgbClr val="8C8C8C"/>
-                </a:solidFill>
-                <a:latin typeface="Arial"/>
-              </a:rPr>
-              <a:t/>
+            <a:off x="640080" y="4494276"/>
+            <a:ext cx="10911535" cy="310896"/>
+          </a:xfrm>
+          <a:prstGeom prst="rect">
+            <a:avLst/>
+          </a:prstGeom>
+          <a:noFill/>
+        </p:spPr>
+        <p:txBody>
+          <a:bodyPr wrap="square">
+            <a:spAutoFit/>
+          </a:bodyPr>
+          <a:lstStyle/>
+          <a:p>
+            <a:pPr algn="ctr"/>
+            <a:r>
+              <a:rPr sz="2000" b="0" i="0">
+                <a:solidFill>
+                  <a:srgbClr val="828282"/>
+                </a:solidFill>
+                <a:latin typeface="Arial"/>
+              </a:rPr>
+              <a:t>我の泉        彼の血のほかなく</a:t>
             </a:r>
           </a:p>
         </p:txBody>
@@ -4727,23 +4657,23 @@
         </p:nvSpPr>
         <p:spPr>
           <a:xfrm>
-            <a:off x="594360" y="2258568"/>
-            <a:ext cx="11002975" cy="685800"/>
-          </a:xfrm>
-          <a:prstGeom prst="rect">
-            <a:avLst/>
-          </a:prstGeom>
-          <a:noFill/>
-        </p:spPr>
-        <p:txBody>
-          <a:bodyPr wrap="square">
-            <a:spAutoFit/>
-          </a:bodyPr>
-          <a:lstStyle/>
-          <a:p>
-            <a:pPr algn="ctr"/>
-            <a:r>
-              <a:rPr sz="4400" b="1" i="0">
+            <a:off x="640080" y="2052828"/>
+            <a:ext cx="10911535" cy="731520"/>
+          </a:xfrm>
+          <a:prstGeom prst="rect">
+            <a:avLst/>
+          </a:prstGeom>
+          <a:noFill/>
+        </p:spPr>
+        <p:txBody>
+          <a:bodyPr wrap="square">
+            <a:spAutoFit/>
+          </a:bodyPr>
+          <a:lstStyle/>
+          <a:p>
+            <a:pPr algn="ctr"/>
+            <a:r>
+              <a:rPr sz="4800" b="1" i="0">
                 <a:solidFill>
                   <a:srgbClr val="FFFFFF"/>
                 </a:solidFill>
@@ -4762,25 +4692,60 @@
         </p:nvSpPr>
         <p:spPr>
           <a:xfrm>
-            <a:off x="594360" y="2980944"/>
-            <a:ext cx="11002975" cy="347472"/>
-          </a:xfrm>
-          <a:prstGeom prst="rect">
-            <a:avLst/>
-          </a:prstGeom>
-          <a:noFill/>
-        </p:spPr>
-        <p:txBody>
-          <a:bodyPr wrap="square">
-            <a:spAutoFit/>
-          </a:bodyPr>
-          <a:lstStyle/>
-          <a:p>
-            <a:pPr algn="ctr"/>
-            <a:r>
-              <a:rPr sz="2200" b="0" i="1">
-                <a:solidFill>
-                  <a:srgbClr val="8C8C8C"/>
+            <a:off x="640080" y="2985516"/>
+            <a:ext cx="10911535" cy="731520"/>
+          </a:xfrm>
+          <a:prstGeom prst="rect">
+            <a:avLst/>
+          </a:prstGeom>
+          <a:noFill/>
+        </p:spPr>
+        <p:txBody>
+          <a:bodyPr wrap="square">
+            <a:spAutoFit/>
+          </a:bodyPr>
+          <a:lstStyle/>
+          <a:p>
+            <a:pPr algn="ctr"/>
+            <a:r>
+              <a:rPr sz="4800" b="1" i="0">
+                <a:solidFill>
+                  <a:srgbClr val="FFFFFF"/>
+                </a:solidFill>
+                <a:latin typeface="Arial"/>
+              </a:rPr>
+              <a:t>Onde ouço a Tua voz</a:t>
+            </a:r>
+          </a:p>
+        </p:txBody>
+      </p:sp>
+      <p:sp>
+        <p:nvSpPr>
+          <p:cNvPr id="4" name="TextBox 3"/>
+          <p:cNvSpPr txBox="1"/>
+          <p:nvPr/>
+        </p:nvSpPr>
+        <p:spPr>
+          <a:xfrm>
+            <a:off x="640080" y="4128516"/>
+            <a:ext cx="10911535" cy="310896"/>
+          </a:xfrm>
+          <a:prstGeom prst="rect">
+            <a:avLst/>
+          </a:prstGeom>
+          <a:noFill/>
+        </p:spPr>
+        <p:txBody>
+          <a:bodyPr wrap="square">
+            <a:spAutoFit/>
+          </a:bodyPr>
+          <a:lstStyle/>
+          <a:p>
+            <a:pPr algn="ctr"/>
+            <a:r>
+              <a:rPr sz="2000" b="0" i="0">
+                <a:solidFill>
+                  <a:srgbClr val="828282"/>
                 </a:solidFill>
                 <a:latin typeface="Arial"/>
               </a:rPr>
@@ -4791,66 +4756,31 @@
       </p:sp>
       <p:sp>
         <p:nvSpPr>
-          <p:cNvPr id="4" name="TextBox 3"/>
-          <p:cNvSpPr txBox="1"/>
-          <p:nvPr/>
-        </p:nvSpPr>
-        <p:spPr>
-          <a:xfrm>
-            <a:off x="594360" y="3529584"/>
-            <a:ext cx="11002975" cy="685800"/>
-          </a:xfrm>
-          <a:prstGeom prst="rect">
-            <a:avLst/>
-          </a:prstGeom>
-          <a:noFill/>
-        </p:spPr>
-        <p:txBody>
-          <a:bodyPr wrap="square">
-            <a:spAutoFit/>
-          </a:bodyPr>
-          <a:lstStyle/>
-          <a:p>
-            <a:pPr algn="ctr"/>
-            <a:r>
-              <a:rPr sz="4400" b="1" i="0">
-                <a:solidFill>
-                  <a:srgbClr val="FFFFFF"/>
-                </a:solidFill>
-                <a:latin typeface="Arial"/>
-              </a:rPr>
-              <a:t>Onde ouço a Tua voz</a:t>
-            </a:r>
-          </a:p>
-        </p:txBody>
-      </p:sp>
-      <p:sp>
-        <p:nvSpPr>
           <p:cNvPr id="5" name="TextBox 4"/>
           <p:cNvSpPr txBox="1"/>
           <p:nvPr/>
         </p:nvSpPr>
         <p:spPr>
           <a:xfrm>
-            <a:off x="594360" y="4251960"/>
-            <a:ext cx="11002975" cy="347472"/>
-          </a:xfrm>
-          <a:prstGeom prst="rect">
-            <a:avLst/>
-          </a:prstGeom>
-          <a:noFill/>
-        </p:spPr>
-        <p:txBody>
-          <a:bodyPr wrap="square">
-            <a:spAutoFit/>
-          </a:bodyPr>
-          <a:lstStyle/>
-          <a:p>
-            <a:pPr algn="ctr"/>
-            <a:r>
-              <a:rPr sz="2200" b="0" i="1">
-                <a:solidFill>
-                  <a:srgbClr val="8C8C8C"/>
+            <a:off x="640080" y="4494276"/>
+            <a:ext cx="10911535" cy="310896"/>
+          </a:xfrm>
+          <a:prstGeom prst="rect">
+            <a:avLst/>
+          </a:prstGeom>
+          <a:noFill/>
+        </p:spPr>
+        <p:txBody>
+          <a:bodyPr wrap="square">
+            <a:spAutoFit/>
+          </a:bodyPr>
+          <a:lstStyle/>
+          <a:p>
+            <a:pPr algn="ctr"/>
+            <a:r>
+              <a:rPr sz="2000" b="0" i="0">
+                <a:solidFill>
+                  <a:srgbClr val="828282"/>
                 </a:solidFill>
                 <a:latin typeface="Arial"/>
               </a:rPr>
@@ -4893,23 +4823,23 @@
         </p:nvSpPr>
         <p:spPr>
           <a:xfrm>
-            <a:off x="594360" y="2258568"/>
-            <a:ext cx="11002975" cy="685800"/>
-          </a:xfrm>
-          <a:prstGeom prst="rect">
-            <a:avLst/>
-          </a:prstGeom>
-          <a:noFill/>
-        </p:spPr>
-        <p:txBody>
-          <a:bodyPr wrap="square">
-            <a:spAutoFit/>
-          </a:bodyPr>
-          <a:lstStyle/>
-          <a:p>
-            <a:pPr algn="ctr"/>
-            <a:r>
-              <a:rPr sz="4400" b="1" i="0">
+            <a:off x="640080" y="2052828"/>
+            <a:ext cx="10911535" cy="731520"/>
+          </a:xfrm>
+          <a:prstGeom prst="rect">
+            <a:avLst/>
+          </a:prstGeom>
+          <a:noFill/>
+        </p:spPr>
+        <p:txBody>
+          <a:bodyPr wrap="square">
+            <a:spAutoFit/>
+          </a:bodyPr>
+          <a:lstStyle/>
+          <a:p>
+            <a:pPr algn="ctr"/>
+            <a:r>
+              <a:rPr sz="4800" b="1" i="0">
                 <a:solidFill>
                   <a:srgbClr val="FFFFFF"/>
                 </a:solidFill>
@@ -4928,25 +4858,60 @@
         </p:nvSpPr>
         <p:spPr>
           <a:xfrm>
-            <a:off x="594360" y="2980944"/>
-            <a:ext cx="11002975" cy="347472"/>
-          </a:xfrm>
-          <a:prstGeom prst="rect">
-            <a:avLst/>
-          </a:prstGeom>
-          <a:noFill/>
-        </p:spPr>
-        <p:txBody>
-          <a:bodyPr wrap="square">
-            <a:spAutoFit/>
-          </a:bodyPr>
-          <a:lstStyle/>
-          <a:p>
-            <a:pPr algn="ctr"/>
-            <a:r>
-              <a:rPr sz="2200" b="0" i="1">
-                <a:solidFill>
-                  <a:srgbClr val="8C8C8C"/>
+            <a:off x="640080" y="2985516"/>
+            <a:ext cx="10911535" cy="731520"/>
+          </a:xfrm>
+          <a:prstGeom prst="rect">
+            <a:avLst/>
+          </a:prstGeom>
+          <a:noFill/>
+        </p:spPr>
+        <p:txBody>
+          <a:bodyPr wrap="square">
+            <a:spAutoFit/>
+          </a:bodyPr>
+          <a:lstStyle/>
+          <a:p>
+            <a:pPr algn="ctr"/>
+            <a:r>
+              <a:rPr sz="4100" b="1" i="0">
+                <a:solidFill>
+                  <a:srgbClr val="FFFFFF"/>
+                </a:solidFill>
+                <a:latin typeface="Arial"/>
+              </a:rPr>
+              <a:t>Mostra tua graça, fala do amor do Pai</a:t>
+            </a:r>
+          </a:p>
+        </p:txBody>
+      </p:sp>
+      <p:sp>
+        <p:nvSpPr>
+          <p:cNvPr id="4" name="TextBox 3"/>
+          <p:cNvSpPr txBox="1"/>
+          <p:nvPr/>
+        </p:nvSpPr>
+        <p:spPr>
+          <a:xfrm>
+            <a:off x="640080" y="4128516"/>
+            <a:ext cx="10911535" cy="310896"/>
+          </a:xfrm>
+          <a:prstGeom prst="rect">
+            <a:avLst/>
+          </a:prstGeom>
+          <a:noFill/>
+        </p:spPr>
+        <p:txBody>
+          <a:bodyPr wrap="square">
+            <a:spAutoFit/>
+          </a:bodyPr>
+          <a:lstStyle/>
+          <a:p>
+            <a:pPr algn="ctr"/>
+            <a:r>
+              <a:rPr sz="2000" b="0" i="0">
+                <a:solidFill>
+                  <a:srgbClr val="828282"/>
                 </a:solidFill>
                 <a:latin typeface="Arial"/>
               </a:rPr>
@@ -4957,66 +4922,31 @@
       </p:sp>
       <p:sp>
         <p:nvSpPr>
-          <p:cNvPr id="4" name="TextBox 3"/>
-          <p:cNvSpPr txBox="1"/>
-          <p:nvPr/>
-        </p:nvSpPr>
-        <p:spPr>
-          <a:xfrm>
-            <a:off x="594360" y="3529584"/>
-            <a:ext cx="11002975" cy="685800"/>
-          </a:xfrm>
-          <a:prstGeom prst="rect">
-            <a:avLst/>
-          </a:prstGeom>
-          <a:noFill/>
-        </p:spPr>
-        <p:txBody>
-          <a:bodyPr wrap="square">
-            <a:spAutoFit/>
-          </a:bodyPr>
-          <a:lstStyle/>
-          <a:p>
-            <a:pPr algn="ctr"/>
-            <a:r>
-              <a:rPr sz="3805" b="1" i="0">
-                <a:solidFill>
-                  <a:srgbClr val="FFFFFF"/>
-                </a:solidFill>
-                <a:latin typeface="Arial"/>
-              </a:rPr>
-              <a:t>Mostra tua graça, fala do amor do Pai</a:t>
-            </a:r>
-          </a:p>
-        </p:txBody>
-      </p:sp>
-      <p:sp>
-        <p:nvSpPr>
           <p:cNvPr id="5" name="TextBox 4"/>
           <p:cNvSpPr txBox="1"/>
           <p:nvPr/>
         </p:nvSpPr>
         <p:spPr>
           <a:xfrm>
-            <a:off x="594360" y="4251960"/>
-            <a:ext cx="11002975" cy="347472"/>
-          </a:xfrm>
-          <a:prstGeom prst="rect">
-            <a:avLst/>
-          </a:prstGeom>
-          <a:noFill/>
-        </p:spPr>
-        <p:txBody>
-          <a:bodyPr wrap="square">
-            <a:spAutoFit/>
-          </a:bodyPr>
-          <a:lstStyle/>
-          <a:p>
-            <a:pPr algn="ctr"/>
-            <a:r>
-              <a:rPr sz="2200" b="0" i="1">
-                <a:solidFill>
-                  <a:srgbClr val="8C8C8C"/>
+            <a:off x="640080" y="4494276"/>
+            <a:ext cx="10911535" cy="310896"/>
+          </a:xfrm>
+          <a:prstGeom prst="rect">
+            <a:avLst/>
+          </a:prstGeom>
+          <a:noFill/>
+        </p:spPr>
+        <p:txBody>
+          <a:bodyPr wrap="square">
+            <a:spAutoFit/>
+          </a:bodyPr>
+          <a:lstStyle/>
+          <a:p>
+            <a:pPr algn="ctr"/>
+            <a:r>
+              <a:rPr sz="2000" b="0" i="0">
+                <a:solidFill>
+                  <a:srgbClr val="828282"/>
                 </a:solidFill>
                 <a:latin typeface="Arial"/>
               </a:rPr>
@@ -5059,23 +4989,23 @@
         </p:nvSpPr>
         <p:spPr>
           <a:xfrm>
-            <a:off x="594360" y="2258568"/>
-            <a:ext cx="11002975" cy="685800"/>
-          </a:xfrm>
-          <a:prstGeom prst="rect">
-            <a:avLst/>
-          </a:prstGeom>
-          <a:noFill/>
-        </p:spPr>
-        <p:txBody>
-          <a:bodyPr wrap="square">
-            <a:spAutoFit/>
-          </a:bodyPr>
-          <a:lstStyle/>
-          <a:p>
-            <a:pPr algn="ctr"/>
-            <a:r>
-              <a:rPr sz="4400" b="1" i="0">
+            <a:off x="640080" y="2052828"/>
+            <a:ext cx="10911535" cy="731520"/>
+          </a:xfrm>
+          <a:prstGeom prst="rect">
+            <a:avLst/>
+          </a:prstGeom>
+          <a:noFill/>
+        </p:spPr>
+        <p:txBody>
+          <a:bodyPr wrap="square">
+            <a:spAutoFit/>
+          </a:bodyPr>
+          <a:lstStyle/>
+          <a:p>
+            <a:pPr algn="ctr"/>
+            <a:r>
+              <a:rPr sz="4800" b="1" i="0">
                 <a:solidFill>
                   <a:srgbClr val="FFFFFF"/>
                 </a:solidFill>
@@ -5094,29 +5024,29 @@
         </p:nvSpPr>
         <p:spPr>
           <a:xfrm>
-            <a:off x="594360" y="2980944"/>
-            <a:ext cx="11002975" cy="347472"/>
-          </a:xfrm>
-          <a:prstGeom prst="rect">
-            <a:avLst/>
-          </a:prstGeom>
-          <a:noFill/>
-        </p:spPr>
-        <p:txBody>
-          <a:bodyPr wrap="square">
-            <a:spAutoFit/>
-          </a:bodyPr>
-          <a:lstStyle/>
-          <a:p>
-            <a:pPr algn="ctr"/>
-            <a:r>
-              <a:rPr sz="2200" b="0" i="1">
-                <a:solidFill>
-                  <a:srgbClr val="8C8C8C"/>
-                </a:solidFill>
-                <a:latin typeface="Arial"/>
-              </a:rPr>
-              <a:t/>
+            <a:off x="640080" y="2985516"/>
+            <a:ext cx="10911535" cy="731520"/>
+          </a:xfrm>
+          <a:prstGeom prst="rect">
+            <a:avLst/>
+          </a:prstGeom>
+          <a:noFill/>
+        </p:spPr>
+        <p:txBody>
+          <a:bodyPr wrap="square">
+            <a:spAutoFit/>
+          </a:bodyPr>
+          <a:lstStyle/>
+          <a:p>
+            <a:pPr algn="ctr"/>
+            <a:r>
+              <a:rPr sz="4800" b="1" i="0">
+                <a:solidFill>
+                  <a:srgbClr val="FFFFFF"/>
+                </a:solidFill>
+                <a:latin typeface="Arial"/>
+              </a:rPr>
+              <a:t>Que nos lava dos pecados</a:t>
             </a:r>
           </a:p>
         </p:txBody>
@@ -5129,29 +5059,29 @@
         </p:nvSpPr>
         <p:spPr>
           <a:xfrm>
-            <a:off x="594360" y="3529584"/>
-            <a:ext cx="11002975" cy="685800"/>
-          </a:xfrm>
-          <a:prstGeom prst="rect">
-            <a:avLst/>
-          </a:prstGeom>
-          <a:noFill/>
-        </p:spPr>
-        <p:txBody>
-          <a:bodyPr wrap="square">
-            <a:spAutoFit/>
-          </a:bodyPr>
-          <a:lstStyle/>
-          <a:p>
-            <a:pPr algn="ctr"/>
-            <a:r>
-              <a:rPr sz="4400" b="1" i="0">
-                <a:solidFill>
-                  <a:srgbClr val="FFFFFF"/>
-                </a:solidFill>
-                <a:latin typeface="Arial"/>
-              </a:rPr>
-              <a:t>Que nos lava dos pecados</a:t>
+            <a:off x="640080" y="4128516"/>
+            <a:ext cx="10911535" cy="310896"/>
+          </a:xfrm>
+          <a:prstGeom prst="rect">
+            <a:avLst/>
+          </a:prstGeom>
+          <a:noFill/>
+        </p:spPr>
+        <p:txBody>
+          <a:bodyPr wrap="square">
+            <a:spAutoFit/>
+          </a:bodyPr>
+          <a:lstStyle/>
+          <a:p>
+            <a:pPr algn="ctr"/>
+            <a:r>
+              <a:rPr sz="2000" b="0" i="0">
+                <a:solidFill>
+                  <a:srgbClr val="828282"/>
+                </a:solidFill>
+                <a:latin typeface="Arial"/>
+              </a:rPr>
+              <a:t>雪のように     真っ白に染むる</a:t>
             </a:r>
           </a:p>
         </p:txBody>
@@ -5164,29 +5094,29 @@
         </p:nvSpPr>
         <p:spPr>
           <a:xfrm>
-            <a:off x="594360" y="4251960"/>
-            <a:ext cx="11002975" cy="347472"/>
-          </a:xfrm>
-          <a:prstGeom prst="rect">
-            <a:avLst/>
-          </a:prstGeom>
-          <a:noFill/>
-        </p:spPr>
-        <p:txBody>
-          <a:bodyPr wrap="square">
-            <a:spAutoFit/>
-          </a:bodyPr>
-          <a:lstStyle/>
-          <a:p>
-            <a:pPr algn="ctr"/>
-            <a:r>
-              <a:rPr sz="2200" b="0" i="1">
-                <a:solidFill>
-                  <a:srgbClr val="8C8C8C"/>
-                </a:solidFill>
-                <a:latin typeface="Arial"/>
-              </a:rPr>
-              <a:t/>
+            <a:off x="640080" y="4494276"/>
+            <a:ext cx="10911535" cy="310896"/>
+          </a:xfrm>
+          <a:prstGeom prst="rect">
+            <a:avLst/>
+          </a:prstGeom>
+          <a:noFill/>
+        </p:spPr>
+        <p:txBody>
+          <a:bodyPr wrap="square">
+            <a:spAutoFit/>
+          </a:bodyPr>
+          <a:lstStyle/>
+          <a:p>
+            <a:pPr algn="ctr"/>
+            <a:r>
+              <a:rPr sz="2000" b="0" i="0">
+                <a:solidFill>
+                  <a:srgbClr val="828282"/>
+                </a:solidFill>
+                <a:latin typeface="Arial"/>
+              </a:rPr>
+              <a:t>我の泉        彼の血のほかなく</a:t>
             </a:r>
           </a:p>
         </p:txBody>
@@ -5225,23 +5155,23 @@
         </p:nvSpPr>
         <p:spPr>
           <a:xfrm>
-            <a:off x="594360" y="2258568"/>
-            <a:ext cx="11002975" cy="685800"/>
-          </a:xfrm>
-          <a:prstGeom prst="rect">
-            <a:avLst/>
-          </a:prstGeom>
-          <a:noFill/>
-        </p:spPr>
-        <p:txBody>
-          <a:bodyPr wrap="square">
-            <a:spAutoFit/>
-          </a:bodyPr>
-          <a:lstStyle/>
-          <a:p>
-            <a:pPr algn="ctr"/>
-            <a:r>
-              <a:rPr sz="4022" b="1" i="0">
+            <a:off x="640080" y="2052828"/>
+            <a:ext cx="10911535" cy="731520"/>
+          </a:xfrm>
+          <a:prstGeom prst="rect">
+            <a:avLst/>
+          </a:prstGeom>
+          <a:noFill/>
+        </p:spPr>
+        <p:txBody>
+          <a:bodyPr wrap="square">
+            <a:spAutoFit/>
+          </a:bodyPr>
+          <a:lstStyle/>
+          <a:p>
+            <a:pPr algn="ctr"/>
+            <a:r>
+              <a:rPr sz="4300" b="1" i="0">
                 <a:solidFill>
                   <a:srgbClr val="FFFFFF"/>
                 </a:solidFill>
@@ -5260,99 +5190,29 @@
         </p:nvSpPr>
         <p:spPr>
           <a:xfrm>
-            <a:off x="594360" y="2980944"/>
-            <a:ext cx="11002975" cy="347472"/>
-          </a:xfrm>
-          <a:prstGeom prst="rect">
-            <a:avLst/>
-          </a:prstGeom>
-          <a:noFill/>
-        </p:spPr>
-        <p:txBody>
-          <a:bodyPr wrap="square">
-            <a:spAutoFit/>
-          </a:bodyPr>
-          <a:lstStyle/>
-          <a:p>
-            <a:pPr algn="ctr"/>
-            <a:r>
-              <a:rPr sz="2200" b="0" i="1">
-                <a:solidFill>
-                  <a:srgbClr val="8C8C8C"/>
-                </a:solidFill>
-                <a:latin typeface="Arial"/>
-              </a:rPr>
-              <a:t/>
-            </a:r>
-          </a:p>
-        </p:txBody>
-      </p:sp>
-      <p:sp>
-        <p:nvSpPr>
-          <p:cNvPr id="4" name="TextBox 3"/>
-          <p:cNvSpPr txBox="1"/>
-          <p:nvPr/>
-        </p:nvSpPr>
-        <p:spPr>
-          <a:xfrm>
-            <a:off x="594360" y="3529584"/>
-            <a:ext cx="11002975" cy="685800"/>
-          </a:xfrm>
-          <a:prstGeom prst="rect">
-            <a:avLst/>
-          </a:prstGeom>
-          <a:noFill/>
-        </p:spPr>
-        <p:txBody>
-          <a:bodyPr wrap="square">
-            <a:spAutoFit/>
-          </a:bodyPr>
-          <a:lstStyle/>
-          <a:p>
-            <a:pPr algn="ctr"/>
-            <a:r>
-              <a:rPr sz="4400" b="1" i="0">
+            <a:off x="640080" y="2985516"/>
+            <a:ext cx="10911535" cy="731520"/>
+          </a:xfrm>
+          <a:prstGeom prst="rect">
+            <a:avLst/>
+          </a:prstGeom>
+          <a:noFill/>
+        </p:spPr>
+        <p:txBody>
+          <a:bodyPr wrap="square">
+            <a:spAutoFit/>
+          </a:bodyPr>
+          <a:lstStyle/>
+          <a:p>
+            <a:pPr algn="ctr"/>
+            <a:r>
+              <a:rPr sz="4800" b="1" i="0">
                 <a:solidFill>
                   <a:srgbClr val="FFFFFF"/>
                 </a:solidFill>
                 <a:latin typeface="Arial"/>
               </a:rPr>
               <a:t>Jesus este é o Teu sangue</a:t>
-            </a:r>
-          </a:p>
-        </p:txBody>
-      </p:sp>
-      <p:sp>
-        <p:nvSpPr>
-          <p:cNvPr id="5" name="TextBox 4"/>
-          <p:cNvSpPr txBox="1"/>
-          <p:nvPr/>
-        </p:nvSpPr>
-        <p:spPr>
-          <a:xfrm>
-            <a:off x="594360" y="4251960"/>
-            <a:ext cx="11002975" cy="347472"/>
-          </a:xfrm>
-          <a:prstGeom prst="rect">
-            <a:avLst/>
-          </a:prstGeom>
-          <a:noFill/>
-        </p:spPr>
-        <p:txBody>
-          <a:bodyPr wrap="square">
-            <a:spAutoFit/>
-          </a:bodyPr>
-          <a:lstStyle/>
-          <a:p>
-            <a:pPr algn="ctr"/>
-            <a:r>
-              <a:rPr sz="2200" b="0" i="1">
-                <a:solidFill>
-                  <a:srgbClr val="8C8C8C"/>
-                </a:solidFill>
-                <a:latin typeface="Arial"/>
-              </a:rPr>
-              <a:t/>
             </a:r>
           </a:p>
         </p:txBody>
@@ -5391,23 +5251,23 @@
         </p:nvSpPr>
         <p:spPr>
           <a:xfrm>
-            <a:off x="594360" y="2258568"/>
-            <a:ext cx="11002975" cy="685800"/>
-          </a:xfrm>
-          <a:prstGeom prst="rect">
-            <a:avLst/>
-          </a:prstGeom>
-          <a:noFill/>
-        </p:spPr>
-        <p:txBody>
-          <a:bodyPr wrap="square">
-            <a:spAutoFit/>
-          </a:bodyPr>
-          <a:lstStyle/>
-          <a:p>
-            <a:pPr algn="ctr"/>
-            <a:r>
-              <a:rPr sz="4400" b="1" i="0">
+            <a:off x="640080" y="2052828"/>
+            <a:ext cx="10911535" cy="731520"/>
+          </a:xfrm>
+          <a:prstGeom prst="rect">
+            <a:avLst/>
+          </a:prstGeom>
+          <a:noFill/>
+        </p:spPr>
+        <p:txBody>
+          <a:bodyPr wrap="square">
+            <a:spAutoFit/>
+          </a:bodyPr>
+          <a:lstStyle/>
+          <a:p>
+            <a:pPr algn="ctr"/>
+            <a:r>
+              <a:rPr sz="4800" b="1" i="0">
                 <a:solidFill>
                   <a:srgbClr val="FFFFFF"/>
                 </a:solidFill>
@@ -5426,25 +5286,60 @@
         </p:nvSpPr>
         <p:spPr>
           <a:xfrm>
-            <a:off x="594360" y="2980944"/>
-            <a:ext cx="11002975" cy="347472"/>
-          </a:xfrm>
-          <a:prstGeom prst="rect">
-            <a:avLst/>
-          </a:prstGeom>
-          <a:noFill/>
-        </p:spPr>
-        <p:txBody>
-          <a:bodyPr wrap="square">
-            <a:spAutoFit/>
-          </a:bodyPr>
-          <a:lstStyle/>
-          <a:p>
-            <a:pPr algn="ctr"/>
-            <a:r>
-              <a:rPr sz="2200" b="0" i="1">
-                <a:solidFill>
-                  <a:srgbClr val="8C8C8C"/>
+            <a:off x="640080" y="2985516"/>
+            <a:ext cx="10911535" cy="731520"/>
+          </a:xfrm>
+          <a:prstGeom prst="rect">
+            <a:avLst/>
+          </a:prstGeom>
+          <a:noFill/>
+        </p:spPr>
+        <p:txBody>
+          <a:bodyPr wrap="square">
+            <a:spAutoFit/>
+          </a:bodyPr>
+          <a:lstStyle/>
+          <a:p>
+            <a:pPr algn="ctr"/>
+            <a:r>
+              <a:rPr sz="4800" b="1" i="0">
+                <a:solidFill>
+                  <a:srgbClr val="FFFFFF"/>
+                </a:solidFill>
+                <a:latin typeface="Arial"/>
+              </a:rPr>
+              <a:t>Onde ouço a Tua voz</a:t>
+            </a:r>
+          </a:p>
+        </p:txBody>
+      </p:sp>
+      <p:sp>
+        <p:nvSpPr>
+          <p:cNvPr id="4" name="TextBox 3"/>
+          <p:cNvSpPr txBox="1"/>
+          <p:nvPr/>
+        </p:nvSpPr>
+        <p:spPr>
+          <a:xfrm>
+            <a:off x="640080" y="4128516"/>
+            <a:ext cx="10911535" cy="310896"/>
+          </a:xfrm>
+          <a:prstGeom prst="rect">
+            <a:avLst/>
+          </a:prstGeom>
+          <a:noFill/>
+        </p:spPr>
+        <p:txBody>
+          <a:bodyPr wrap="square">
+            <a:spAutoFit/>
+          </a:bodyPr>
+          <a:lstStyle/>
+          <a:p>
+            <a:pPr algn="ctr"/>
+            <a:r>
+              <a:rPr sz="2000" b="0" i="0">
+                <a:solidFill>
+                  <a:srgbClr val="828282"/>
                 </a:solidFill>
                 <a:latin typeface="Arial"/>
               </a:rPr>
@@ -5455,66 +5350,31 @@
       </p:sp>
       <p:sp>
         <p:nvSpPr>
-          <p:cNvPr id="4" name="TextBox 3"/>
-          <p:cNvSpPr txBox="1"/>
-          <p:nvPr/>
-        </p:nvSpPr>
-        <p:spPr>
-          <a:xfrm>
-            <a:off x="594360" y="3529584"/>
-            <a:ext cx="11002975" cy="685800"/>
-          </a:xfrm>
-          <a:prstGeom prst="rect">
-            <a:avLst/>
-          </a:prstGeom>
-          <a:noFill/>
-        </p:spPr>
-        <p:txBody>
-          <a:bodyPr wrap="square">
-            <a:spAutoFit/>
-          </a:bodyPr>
-          <a:lstStyle/>
-          <a:p>
-            <a:pPr algn="ctr"/>
-            <a:r>
-              <a:rPr sz="4400" b="1" i="0">
-                <a:solidFill>
-                  <a:srgbClr val="FFFFFF"/>
-                </a:solidFill>
-                <a:latin typeface="Arial"/>
-              </a:rPr>
-              <a:t>Onde ouço a Tua voz</a:t>
-            </a:r>
-          </a:p>
-        </p:txBody>
-      </p:sp>
-      <p:sp>
-        <p:nvSpPr>
           <p:cNvPr id="5" name="TextBox 4"/>
           <p:cNvSpPr txBox="1"/>
           <p:nvPr/>
         </p:nvSpPr>
         <p:spPr>
           <a:xfrm>
-            <a:off x="594360" y="4251960"/>
-            <a:ext cx="11002975" cy="347472"/>
-          </a:xfrm>
-          <a:prstGeom prst="rect">
-            <a:avLst/>
-          </a:prstGeom>
-          <a:noFill/>
-        </p:spPr>
-        <p:txBody>
-          <a:bodyPr wrap="square">
-            <a:spAutoFit/>
-          </a:bodyPr>
-          <a:lstStyle/>
-          <a:p>
-            <a:pPr algn="ctr"/>
-            <a:r>
-              <a:rPr sz="2200" b="0" i="1">
-                <a:solidFill>
-                  <a:srgbClr val="8C8C8C"/>
+            <a:off x="640080" y="4494276"/>
+            <a:ext cx="10911535" cy="310896"/>
+          </a:xfrm>
+          <a:prstGeom prst="rect">
+            <a:avLst/>
+          </a:prstGeom>
+          <a:noFill/>
+        </p:spPr>
+        <p:txBody>
+          <a:bodyPr wrap="square">
+            <a:spAutoFit/>
+          </a:bodyPr>
+          <a:lstStyle/>
+          <a:p>
+            <a:pPr algn="ctr"/>
+            <a:r>
+              <a:rPr sz="2000" b="0" i="0">
+                <a:solidFill>
+                  <a:srgbClr val="828282"/>
                 </a:solidFill>
                 <a:latin typeface="Arial"/>
               </a:rPr>
@@ -5557,23 +5417,23 @@
         </p:nvSpPr>
         <p:spPr>
           <a:xfrm>
-            <a:off x="594360" y="2258568"/>
-            <a:ext cx="11002975" cy="685800"/>
-          </a:xfrm>
-          <a:prstGeom prst="rect">
-            <a:avLst/>
-          </a:prstGeom>
-          <a:noFill/>
-        </p:spPr>
-        <p:txBody>
-          <a:bodyPr wrap="square">
-            <a:spAutoFit/>
-          </a:bodyPr>
-          <a:lstStyle/>
-          <a:p>
-            <a:pPr algn="ctr"/>
-            <a:r>
-              <a:rPr sz="4400" b="1" i="0">
+            <a:off x="640080" y="2052828"/>
+            <a:ext cx="10911535" cy="731520"/>
+          </a:xfrm>
+          <a:prstGeom prst="rect">
+            <a:avLst/>
+          </a:prstGeom>
+          <a:noFill/>
+        </p:spPr>
+        <p:txBody>
+          <a:bodyPr wrap="square">
+            <a:spAutoFit/>
+          </a:bodyPr>
+          <a:lstStyle/>
+          <a:p>
+            <a:pPr algn="ctr"/>
+            <a:r>
+              <a:rPr sz="4800" b="1" i="0">
                 <a:solidFill>
                   <a:srgbClr val="FFFFFF"/>
                 </a:solidFill>
@@ -5592,25 +5452,60 @@
         </p:nvSpPr>
         <p:spPr>
           <a:xfrm>
-            <a:off x="594360" y="2980944"/>
-            <a:ext cx="11002975" cy="347472"/>
-          </a:xfrm>
-          <a:prstGeom prst="rect">
-            <a:avLst/>
-          </a:prstGeom>
-          <a:noFill/>
-        </p:spPr>
-        <p:txBody>
-          <a:bodyPr wrap="square">
-            <a:spAutoFit/>
-          </a:bodyPr>
-          <a:lstStyle/>
-          <a:p>
-            <a:pPr algn="ctr"/>
-            <a:r>
-              <a:rPr sz="2200" b="0" i="1">
-                <a:solidFill>
-                  <a:srgbClr val="8C8C8C"/>
+            <a:off x="640080" y="2985516"/>
+            <a:ext cx="10911535" cy="731520"/>
+          </a:xfrm>
+          <a:prstGeom prst="rect">
+            <a:avLst/>
+          </a:prstGeom>
+          <a:noFill/>
+        </p:spPr>
+        <p:txBody>
+          <a:bodyPr wrap="square">
+            <a:spAutoFit/>
+          </a:bodyPr>
+          <a:lstStyle/>
+          <a:p>
+            <a:pPr algn="ctr"/>
+            <a:r>
+              <a:rPr sz="4100" b="1" i="0">
+                <a:solidFill>
+                  <a:srgbClr val="FFFFFF"/>
+                </a:solidFill>
+                <a:latin typeface="Arial"/>
+              </a:rPr>
+              <a:t>Mostra tua graça, fala do amor do Pai</a:t>
+            </a:r>
+          </a:p>
+        </p:txBody>
+      </p:sp>
+      <p:sp>
+        <p:nvSpPr>
+          <p:cNvPr id="4" name="TextBox 3"/>
+          <p:cNvSpPr txBox="1"/>
+          <p:nvPr/>
+        </p:nvSpPr>
+        <p:spPr>
+          <a:xfrm>
+            <a:off x="640080" y="4128516"/>
+            <a:ext cx="10911535" cy="310896"/>
+          </a:xfrm>
+          <a:prstGeom prst="rect">
+            <a:avLst/>
+          </a:prstGeom>
+          <a:noFill/>
+        </p:spPr>
+        <p:txBody>
+          <a:bodyPr wrap="square">
+            <a:spAutoFit/>
+          </a:bodyPr>
+          <a:lstStyle/>
+          <a:p>
+            <a:pPr algn="ctr"/>
+            <a:r>
+              <a:rPr sz="2000" b="0" i="0">
+                <a:solidFill>
+                  <a:srgbClr val="828282"/>
                 </a:solidFill>
                 <a:latin typeface="Arial"/>
               </a:rPr>
@@ -5621,66 +5516,31 @@
       </p:sp>
       <p:sp>
         <p:nvSpPr>
-          <p:cNvPr id="4" name="TextBox 3"/>
-          <p:cNvSpPr txBox="1"/>
-          <p:nvPr/>
-        </p:nvSpPr>
-        <p:spPr>
-          <a:xfrm>
-            <a:off x="594360" y="3529584"/>
-            <a:ext cx="11002975" cy="685800"/>
-          </a:xfrm>
-          <a:prstGeom prst="rect">
-            <a:avLst/>
-          </a:prstGeom>
-          <a:noFill/>
-        </p:spPr>
-        <p:txBody>
-          <a:bodyPr wrap="square">
-            <a:spAutoFit/>
-          </a:bodyPr>
-          <a:lstStyle/>
-          <a:p>
-            <a:pPr algn="ctr"/>
-            <a:r>
-              <a:rPr sz="3805" b="1" i="0">
-                <a:solidFill>
-                  <a:srgbClr val="FFFFFF"/>
-                </a:solidFill>
-                <a:latin typeface="Arial"/>
-              </a:rPr>
-              <a:t>Mostra tua graça, fala do amor do Pai</a:t>
-            </a:r>
-          </a:p>
-        </p:txBody>
-      </p:sp>
-      <p:sp>
-        <p:nvSpPr>
           <p:cNvPr id="5" name="TextBox 4"/>
           <p:cNvSpPr txBox="1"/>
           <p:nvPr/>
         </p:nvSpPr>
         <p:spPr>
           <a:xfrm>
-            <a:off x="594360" y="4251960"/>
-            <a:ext cx="11002975" cy="347472"/>
-          </a:xfrm>
-          <a:prstGeom prst="rect">
-            <a:avLst/>
-          </a:prstGeom>
-          <a:noFill/>
-        </p:spPr>
-        <p:txBody>
-          <a:bodyPr wrap="square">
-            <a:spAutoFit/>
-          </a:bodyPr>
-          <a:lstStyle/>
-          <a:p>
-            <a:pPr algn="ctr"/>
-            <a:r>
-              <a:rPr sz="2200" b="0" i="1">
-                <a:solidFill>
-                  <a:srgbClr val="8C8C8C"/>
+            <a:off x="640080" y="4494276"/>
+            <a:ext cx="10911535" cy="310896"/>
+          </a:xfrm>
+          <a:prstGeom prst="rect">
+            <a:avLst/>
+          </a:prstGeom>
+          <a:noFill/>
+        </p:spPr>
+        <p:txBody>
+          <a:bodyPr wrap="square">
+            <a:spAutoFit/>
+          </a:bodyPr>
+          <a:lstStyle/>
+          <a:p>
+            <a:pPr algn="ctr"/>
+            <a:r>
+              <a:rPr sz="2000" b="0" i="0">
+                <a:solidFill>
+                  <a:srgbClr val="828282"/>
                 </a:solidFill>
                 <a:latin typeface="Arial"/>
               </a:rPr>
@@ -5723,23 +5583,23 @@
         </p:nvSpPr>
         <p:spPr>
           <a:xfrm>
-            <a:off x="594360" y="2258568"/>
-            <a:ext cx="11002975" cy="685800"/>
-          </a:xfrm>
-          <a:prstGeom prst="rect">
-            <a:avLst/>
-          </a:prstGeom>
-          <a:noFill/>
-        </p:spPr>
-        <p:txBody>
-          <a:bodyPr wrap="square">
-            <a:spAutoFit/>
-          </a:bodyPr>
-          <a:lstStyle/>
-          <a:p>
-            <a:pPr algn="ctr"/>
-            <a:r>
-              <a:rPr sz="4400" b="1" i="0">
+            <a:off x="640080" y="2052828"/>
+            <a:ext cx="10911535" cy="731520"/>
+          </a:xfrm>
+          <a:prstGeom prst="rect">
+            <a:avLst/>
+          </a:prstGeom>
+          <a:noFill/>
+        </p:spPr>
+        <p:txBody>
+          <a:bodyPr wrap="square">
+            <a:spAutoFit/>
+          </a:bodyPr>
+          <a:lstStyle/>
+          <a:p>
+            <a:pPr algn="ctr"/>
+            <a:r>
+              <a:rPr sz="4800" b="1" i="0">
                 <a:solidFill>
                   <a:srgbClr val="FFFFFF"/>
                 </a:solidFill>
@@ -5758,29 +5618,29 @@
         </p:nvSpPr>
         <p:spPr>
           <a:xfrm>
-            <a:off x="594360" y="2980944"/>
-            <a:ext cx="11002975" cy="347472"/>
-          </a:xfrm>
-          <a:prstGeom prst="rect">
-            <a:avLst/>
-          </a:prstGeom>
-          <a:noFill/>
-        </p:spPr>
-        <p:txBody>
-          <a:bodyPr wrap="square">
-            <a:spAutoFit/>
-          </a:bodyPr>
-          <a:lstStyle/>
-          <a:p>
-            <a:pPr algn="ctr"/>
-            <a:r>
-              <a:rPr sz="2200" b="0" i="1">
-                <a:solidFill>
-                  <a:srgbClr val="8C8C8C"/>
-                </a:solidFill>
-                <a:latin typeface="Arial"/>
-              </a:rPr>
-              <a:t/>
+            <a:off x="640080" y="2985516"/>
+            <a:ext cx="10911535" cy="731520"/>
+          </a:xfrm>
+          <a:prstGeom prst="rect">
+            <a:avLst/>
+          </a:prstGeom>
+          <a:noFill/>
+        </p:spPr>
+        <p:txBody>
+          <a:bodyPr wrap="square">
+            <a:spAutoFit/>
+          </a:bodyPr>
+          <a:lstStyle/>
+          <a:p>
+            <a:pPr algn="ctr"/>
+            <a:r>
+              <a:rPr sz="4800" b="1" i="0">
+                <a:solidFill>
+                  <a:srgbClr val="FFFFFF"/>
+                </a:solidFill>
+                <a:latin typeface="Arial"/>
+              </a:rPr>
+              <a:t>Que nos lava dos pecados</a:t>
             </a:r>
           </a:p>
         </p:txBody>
@@ -5793,29 +5653,29 @@
         </p:nvSpPr>
         <p:spPr>
           <a:xfrm>
-            <a:off x="594360" y="3529584"/>
-            <a:ext cx="11002975" cy="685800"/>
-          </a:xfrm>
-          <a:prstGeom prst="rect">
-            <a:avLst/>
-          </a:prstGeom>
-          <a:noFill/>
-        </p:spPr>
-        <p:txBody>
-          <a:bodyPr wrap="square">
-            <a:spAutoFit/>
-          </a:bodyPr>
-          <a:lstStyle/>
-          <a:p>
-            <a:pPr algn="ctr"/>
-            <a:r>
-              <a:rPr sz="4400" b="1" i="0">
-                <a:solidFill>
-                  <a:srgbClr val="FFFFFF"/>
-                </a:solidFill>
-                <a:latin typeface="Arial"/>
-              </a:rPr>
-              <a:t>Que nos lava dos pecados</a:t>
+            <a:off x="640080" y="4128516"/>
+            <a:ext cx="10911535" cy="310896"/>
+          </a:xfrm>
+          <a:prstGeom prst="rect">
+            <a:avLst/>
+          </a:prstGeom>
+          <a:noFill/>
+        </p:spPr>
+        <p:txBody>
+          <a:bodyPr wrap="square">
+            <a:spAutoFit/>
+          </a:bodyPr>
+          <a:lstStyle/>
+          <a:p>
+            <a:pPr algn="ctr"/>
+            <a:r>
+              <a:rPr sz="2000" b="0" i="0">
+                <a:solidFill>
+                  <a:srgbClr val="828282"/>
+                </a:solidFill>
+                <a:latin typeface="Arial"/>
+              </a:rPr>
+              <a:t>雪のように     真っ白に染むる</a:t>
             </a:r>
           </a:p>
         </p:txBody>
@@ -5828,29 +5688,29 @@
         </p:nvSpPr>
         <p:spPr>
           <a:xfrm>
-            <a:off x="594360" y="4251960"/>
-            <a:ext cx="11002975" cy="347472"/>
-          </a:xfrm>
-          <a:prstGeom prst="rect">
-            <a:avLst/>
-          </a:prstGeom>
-          <a:noFill/>
-        </p:spPr>
-        <p:txBody>
-          <a:bodyPr wrap="square">
-            <a:spAutoFit/>
-          </a:bodyPr>
-          <a:lstStyle/>
-          <a:p>
-            <a:pPr algn="ctr"/>
-            <a:r>
-              <a:rPr sz="2200" b="0" i="1">
-                <a:solidFill>
-                  <a:srgbClr val="8C8C8C"/>
-                </a:solidFill>
-                <a:latin typeface="Arial"/>
-              </a:rPr>
-              <a:t/>
+            <a:off x="640080" y="4494276"/>
+            <a:ext cx="10911535" cy="310896"/>
+          </a:xfrm>
+          <a:prstGeom prst="rect">
+            <a:avLst/>
+          </a:prstGeom>
+          <a:noFill/>
+        </p:spPr>
+        <p:txBody>
+          <a:bodyPr wrap="square">
+            <a:spAutoFit/>
+          </a:bodyPr>
+          <a:lstStyle/>
+          <a:p>
+            <a:pPr algn="ctr"/>
+            <a:r>
+              <a:rPr sz="2000" b="0" i="0">
+                <a:solidFill>
+                  <a:srgbClr val="828282"/>
+                </a:solidFill>
+                <a:latin typeface="Arial"/>
+              </a:rPr>
+              <a:t>我の泉        彼の血のほかなく</a:t>
             </a:r>
           </a:p>
         </p:txBody>
@@ -5889,23 +5749,23 @@
         </p:nvSpPr>
         <p:spPr>
           <a:xfrm>
-            <a:off x="594360" y="1837944"/>
-            <a:ext cx="11002975" cy="685800"/>
-          </a:xfrm>
-          <a:prstGeom prst="rect">
-            <a:avLst/>
-          </a:prstGeom>
-          <a:noFill/>
-        </p:spPr>
-        <p:txBody>
-          <a:bodyPr wrap="square">
-            <a:spAutoFit/>
-          </a:bodyPr>
-          <a:lstStyle/>
-          <a:p>
-            <a:pPr algn="ctr"/>
-            <a:r>
-              <a:rPr sz="4400" b="1" i="0">
+            <a:off x="640080" y="1650492"/>
+            <a:ext cx="10911535" cy="731520"/>
+          </a:xfrm>
+          <a:prstGeom prst="rect">
+            <a:avLst/>
+          </a:prstGeom>
+          <a:noFill/>
+        </p:spPr>
+        <p:txBody>
+          <a:bodyPr wrap="square">
+            <a:spAutoFit/>
+          </a:bodyPr>
+          <a:lstStyle/>
+          <a:p>
+            <a:pPr algn="ctr"/>
+            <a:r>
+              <a:rPr sz="4800" b="1" i="0">
                 <a:solidFill>
                   <a:srgbClr val="FFFFFF"/>
                 </a:solidFill>
@@ -5924,8 +5784,8 @@
         </p:nvSpPr>
         <p:spPr>
           <a:xfrm>
-            <a:off x="594360" y="2560320"/>
-            <a:ext cx="11002975" cy="384048"/>
+            <a:off x="640080" y="2418588"/>
+            <a:ext cx="10911535" cy="365760"/>
           </a:xfrm>
           <a:prstGeom prst="rect">
             <a:avLst/>
@@ -5942,7 +5802,7 @@
             <a:r>
               <a:rPr sz="2400" b="0" i="1">
                 <a:solidFill>
-                  <a:srgbClr val="B4B4B4"/>
+                  <a:srgbClr val="AAAAAA"/>
                 </a:solidFill>
                 <a:latin typeface="Arial"/>
               </a:rPr>
@@ -5959,29 +5819,29 @@
         </p:nvSpPr>
         <p:spPr>
           <a:xfrm>
-            <a:off x="594360" y="2980944"/>
-            <a:ext cx="11002975" cy="347472"/>
-          </a:xfrm>
-          <a:prstGeom prst="rect">
-            <a:avLst/>
-          </a:prstGeom>
-          <a:noFill/>
-        </p:spPr>
-        <p:txBody>
-          <a:bodyPr wrap="square">
-            <a:spAutoFit/>
-          </a:bodyPr>
-          <a:lstStyle/>
-          <a:p>
-            <a:pPr algn="ctr"/>
-            <a:r>
-              <a:rPr sz="2000" b="0" i="1">
-                <a:solidFill>
-                  <a:srgbClr val="8C8C8C"/>
-                </a:solidFill>
-                <a:latin typeface="Arial"/>
-              </a:rPr>
-              <a:t/>
+            <a:off x="640080" y="2985516"/>
+            <a:ext cx="10911535" cy="731520"/>
+          </a:xfrm>
+          <a:prstGeom prst="rect">
+            <a:avLst/>
+          </a:prstGeom>
+          <a:noFill/>
+        </p:spPr>
+        <p:txBody>
+          <a:bodyPr wrap="square">
+            <a:spAutoFit/>
+          </a:bodyPr>
+          <a:lstStyle/>
+          <a:p>
+            <a:pPr algn="ctr"/>
+            <a:r>
+              <a:rPr sz="4800" b="1" i="0">
+                <a:solidFill>
+                  <a:srgbClr val="FFFFFF"/>
+                </a:solidFill>
+                <a:latin typeface="Arial"/>
+              </a:rPr>
+              <a:t>我 満たしうるは       彼の血のほかなく</a:t>
             </a:r>
           </a:p>
         </p:txBody>
@@ -5994,43 +5854,8 @@
         </p:nvSpPr>
         <p:spPr>
           <a:xfrm>
-            <a:off x="594360" y="3529584"/>
-            <a:ext cx="11002975" cy="685800"/>
-          </a:xfrm>
-          <a:prstGeom prst="rect">
-            <a:avLst/>
-          </a:prstGeom>
-          <a:noFill/>
-        </p:spPr>
-        <p:txBody>
-          <a:bodyPr wrap="square">
-            <a:spAutoFit/>
-          </a:bodyPr>
-          <a:lstStyle/>
-          <a:p>
-            <a:pPr algn="ctr"/>
-            <a:r>
-              <a:rPr sz="4400" b="1" i="0">
-                <a:solidFill>
-                  <a:srgbClr val="FFFFFF"/>
-                </a:solidFill>
-                <a:latin typeface="Arial"/>
-              </a:rPr>
-              <a:t>我 満たしうるは       彼の血のほかなく</a:t>
-            </a:r>
-          </a:p>
-        </p:txBody>
-      </p:sp>
-      <p:sp>
-        <p:nvSpPr>
-          <p:cNvPr id="6" name="TextBox 5"/>
-          <p:cNvSpPr txBox="1"/>
-          <p:nvPr/>
-        </p:nvSpPr>
-        <p:spPr>
-          <a:xfrm>
-            <a:off x="594360" y="4251960"/>
-            <a:ext cx="11002975" cy="384048"/>
+            <a:off x="640080" y="3753612"/>
+            <a:ext cx="10911535" cy="365760"/>
           </a:xfrm>
           <a:prstGeom prst="rect">
             <a:avLst/>
@@ -6047,46 +5872,11 @@
             <a:r>
               <a:rPr sz="2400" b="0" i="1">
                 <a:solidFill>
-                  <a:srgbClr val="B4B4B4"/>
+                  <a:srgbClr val="AAAAAA"/>
                 </a:solidFill>
                 <a:latin typeface="Arial"/>
               </a:rPr>
               <a:t>ware mitashi uruwa kano chino hoka naku</a:t>
-            </a:r>
-          </a:p>
-        </p:txBody>
-      </p:sp>
-      <p:sp>
-        <p:nvSpPr>
-          <p:cNvPr id="7" name="TextBox 6"/>
-          <p:cNvSpPr txBox="1"/>
-          <p:nvPr/>
-        </p:nvSpPr>
-        <p:spPr>
-          <a:xfrm>
-            <a:off x="594360" y="4672584"/>
-            <a:ext cx="11002975" cy="347472"/>
-          </a:xfrm>
-          <a:prstGeom prst="rect">
-            <a:avLst/>
-          </a:prstGeom>
-          <a:noFill/>
-        </p:spPr>
-        <p:txBody>
-          <a:bodyPr wrap="square">
-            <a:spAutoFit/>
-          </a:bodyPr>
-          <a:lstStyle/>
-          <a:p>
-            <a:pPr algn="ctr"/>
-            <a:r>
-              <a:rPr sz="2000" b="0" i="1">
-                <a:solidFill>
-                  <a:srgbClr val="8C8C8C"/>
-                </a:solidFill>
-                <a:latin typeface="Arial"/>
-              </a:rPr>
-              <a:t/>
             </a:r>
           </a:p>
         </p:txBody>

--- a/output_pptx/Nothing_But_The_Blood.pptx
+++ b/output_pptx/Nothing_But_The_Blood.pptx
@@ -3181,6 +3181,76 @@
           </a:p>
         </p:txBody>
       </p:sp>
+      <p:sp>
+        <p:nvSpPr>
+          <p:cNvPr id="4" name="TextBox 3"/>
+          <p:cNvSpPr txBox="1"/>
+          <p:nvPr/>
+        </p:nvSpPr>
+        <p:spPr>
+          <a:xfrm>
+            <a:off x="640080" y="4128516"/>
+            <a:ext cx="10911535" cy="310896"/>
+          </a:xfrm>
+          <a:prstGeom prst="rect">
+            <a:avLst/>
+          </a:prstGeom>
+          <a:noFill/>
+        </p:spPr>
+        <p:txBody>
+          <a:bodyPr wrap="square">
+            <a:spAutoFit/>
+          </a:bodyPr>
+          <a:lstStyle/>
+          <a:p>
+            <a:pPr algn="ctr"/>
+            <a:r>
+              <a:rPr sz="2000" b="0" i="0">
+                <a:solidFill>
+                  <a:srgbClr val="828282"/>
+                </a:solidFill>
+                <a:latin typeface="Arial"/>
+              </a:rPr>
+              <a:t>血以外に何もない</a:t>
+            </a:r>
+          </a:p>
+        </p:txBody>
+      </p:sp>
+      <p:sp>
+        <p:nvSpPr>
+          <p:cNvPr id="5" name="TextBox 4"/>
+          <p:cNvSpPr txBox="1"/>
+          <p:nvPr/>
+        </p:nvSpPr>
+        <p:spPr>
+          <a:xfrm>
+            <a:off x="640080" y="4494276"/>
+            <a:ext cx="10911535" cy="310896"/>
+          </a:xfrm>
+          <a:prstGeom prst="rect">
+            <a:avLst/>
+          </a:prstGeom>
+          <a:noFill/>
+        </p:spPr>
+        <p:txBody>
+          <a:bodyPr wrap="square">
+            <a:spAutoFit/>
+          </a:bodyPr>
+          <a:lstStyle/>
+          <a:p>
+            <a:pPr algn="ctr"/>
+            <a:r>
+              <a:rPr sz="2000" b="0" i="0">
+                <a:solidFill>
+                  <a:srgbClr val="828282"/>
+                </a:solidFill>
+                <a:latin typeface="Arial"/>
+              </a:rPr>
+              <a:t>あなたの血</a:t>
+            </a:r>
+          </a:p>
+        </p:txBody>
+      </p:sp>
     </p:spTree>
   </p:cSld>
   <p:clrMapOvr>
@@ -5217,6 +5287,76 @@
           </a:p>
         </p:txBody>
       </p:sp>
+      <p:sp>
+        <p:nvSpPr>
+          <p:cNvPr id="4" name="TextBox 3"/>
+          <p:cNvSpPr txBox="1"/>
+          <p:nvPr/>
+        </p:nvSpPr>
+        <p:spPr>
+          <a:xfrm>
+            <a:off x="640080" y="4128516"/>
+            <a:ext cx="10911535" cy="310896"/>
+          </a:xfrm>
+          <a:prstGeom prst="rect">
+            <a:avLst/>
+          </a:prstGeom>
+          <a:noFill/>
+        </p:spPr>
+        <p:txBody>
+          <a:bodyPr wrap="square">
+            <a:spAutoFit/>
+          </a:bodyPr>
+          <a:lstStyle/>
+          <a:p>
+            <a:pPr algn="ctr"/>
+            <a:r>
+              <a:rPr sz="2000" b="0" i="0">
+                <a:solidFill>
+                  <a:srgbClr val="828282"/>
+                </a:solidFill>
+                <a:latin typeface="Arial"/>
+              </a:rPr>
+              <a:t>あなたの正義が私の人生のために語りかける</a:t>
+            </a:r>
+          </a:p>
+        </p:txBody>
+      </p:sp>
+      <p:sp>
+        <p:nvSpPr>
+          <p:cNvPr id="5" name="TextBox 4"/>
+          <p:cNvSpPr txBox="1"/>
+          <p:nvPr/>
+        </p:nvSpPr>
+        <p:spPr>
+          <a:xfrm>
+            <a:off x="640080" y="4494276"/>
+            <a:ext cx="10911535" cy="310896"/>
+          </a:xfrm>
+          <a:prstGeom prst="rect">
+            <a:avLst/>
+          </a:prstGeom>
+          <a:noFill/>
+        </p:spPr>
+        <p:txBody>
+          <a:bodyPr wrap="square">
+            <a:spAutoFit/>
+          </a:bodyPr>
+          <a:lstStyle/>
+          <a:p>
+            <a:pPr algn="ctr"/>
+            <a:r>
+              <a:rPr sz="2000" b="0" i="0">
+                <a:solidFill>
+                  <a:srgbClr val="828282"/>
+                </a:solidFill>
+                <a:latin typeface="Arial"/>
+              </a:rPr>
+              <a:t>イエスよ、これがあなたの血だ</a:t>
+            </a:r>
+          </a:p>
+        </p:txBody>
+      </p:sp>
     </p:spTree>
   </p:cSld>
   <p:clrMapOvr>
@@ -5877,6 +6017,76 @@
                 <a:latin typeface="Arial"/>
               </a:rPr>
               <a:t>ware mitashi uruwa kano chino hoka naku</a:t>
+            </a:r>
+          </a:p>
+        </p:txBody>
+      </p:sp>
+      <p:sp>
+        <p:nvSpPr>
+          <p:cNvPr id="6" name="TextBox 5"/>
+          <p:cNvSpPr txBox="1"/>
+          <p:nvPr/>
+        </p:nvSpPr>
+        <p:spPr>
+          <a:xfrm>
+            <a:off x="640080" y="4530852"/>
+            <a:ext cx="10911535" cy="310896"/>
+          </a:xfrm>
+          <a:prstGeom prst="rect">
+            <a:avLst/>
+          </a:prstGeom>
+          <a:noFill/>
+        </p:spPr>
+        <p:txBody>
+          <a:bodyPr wrap="square">
+            <a:spAutoFit/>
+          </a:bodyPr>
+          <a:lstStyle/>
+          <a:p>
+            <a:pPr algn="ctr"/>
+            <a:r>
+              <a:rPr sz="2000" b="0" i="1">
+                <a:solidFill>
+                  <a:srgbClr val="828282"/>
+                </a:solidFill>
+                <a:latin typeface="Arial"/>
+              </a:rPr>
+              <a:t>Nada mais pode lavar o pecado senão o seu sangue</a:t>
+            </a:r>
+          </a:p>
+        </p:txBody>
+      </p:sp>
+      <p:sp>
+        <p:nvSpPr>
+          <p:cNvPr id="7" name="TextBox 6"/>
+          <p:cNvSpPr txBox="1"/>
+          <p:nvPr/>
+        </p:nvSpPr>
+        <p:spPr>
+          <a:xfrm>
+            <a:off x="640080" y="4896612"/>
+            <a:ext cx="10911535" cy="310896"/>
+          </a:xfrm>
+          <a:prstGeom prst="rect">
+            <a:avLst/>
+          </a:prstGeom>
+          <a:noFill/>
+        </p:spPr>
+        <p:txBody>
+          <a:bodyPr wrap="square">
+            <a:spAutoFit/>
+          </a:bodyPr>
+          <a:lstStyle/>
+          <a:p>
+            <a:pPr algn="ctr"/>
+            <a:r>
+              <a:rPr sz="2000" b="0" i="1">
+                <a:solidFill>
+                  <a:srgbClr val="828282"/>
+                </a:solidFill>
+                <a:latin typeface="Arial"/>
+              </a:rPr>
+              <a:t>Nada mais pode me satisfazer senão o seu sangue</a:t>
             </a:r>
           </a:p>
         </p:txBody>
